--- a/freelance/samples/pptx/Crime_Scene_Investigation_Basics.pptx
+++ b/freelance/samples/pptx/Crime_Scene_Investigation_Basics.pptx
@@ -512,7 +512,7 @@
           <a:lstStyle/>
           <a:p>
             <a:r>
-              <a:t>Good morning instructors and fellow criminology students. Today we examine the fundamental protocols of Crime Scene Investigation—where forensic science meets criminal jurisprudence.</a:t>
+              <a:t>Good morning class. Today we examine the core scientific and procedural foundations of Crime Scene Investigation. Our focus centers on evidence preservation, meticulous documentation, and courtroom admissibility.</a:t>
             </a:r>
           </a:p>
         </p:txBody>
@@ -582,7 +582,7 @@
           <a:lstStyle/>
           <a:p>
             <a:r>
-              <a:t>To conclude: physical evidence does not lie. It does not forget. But it can be ruined by careless human hands. Rigorous discipline is our solemn duty.</a:t>
+              <a:t>In conclusion, a forensic investigator is a seeker of truth. By combining scientific precision with ethical integrity, you ensure that the innocent are vindicated and the guilty held accountable.</a:t>
             </a:r>
           </a:p>
         </p:txBody>
@@ -652,7 +652,7 @@
           <a:lstStyle/>
           <a:p>
             <a:r>
-              <a:t>Thank you for your attention. Here are our official legal references from the PNP Criminal Investigation Manual and the Revised Rules on Evidence.</a:t>
+              <a:t>Thank you class. Methodical science protects the integrity of our judicial system. Review your procedural manuals for our upcoming laboratory practical on evidence collection.</a:t>
             </a:r>
           </a:p>
         </p:txBody>
@@ -722,7 +722,7 @@
           <a:lstStyle/>
           <a:p>
             <a:r>
-              <a:t>Our agenda covers four critical pillars: the Golden Rule, first responder duties, systematic search patterns, and chain of custody documentation.</a:t>
+              <a:t>As Dr. Locard established: 'Wherever he steps, whatever he touches, whatever he leaves, will serve as a silent witness against him.' Our sacred duty is to preserve those microscopic traces without contamination.</a:t>
             </a:r>
           </a:p>
         </p:txBody>
@@ -792,7 +792,7 @@
           <a:lstStyle/>
           <a:p>
             <a:r>
-              <a:t>The Golden Rule of CSI is absolute. Once a crime scene is contaminated, physical evidence loses its judicial admissibility and cases collapse in court.</a:t>
+              <a:t>The initial response dictates the ultimate success of prosecution. Securing the physical perimeter prevents contamination by curious bystanders, media, and unauthorized personnel.</a:t>
             </a:r>
           </a:p>
         </p:txBody>
@@ -862,7 +862,7 @@
           <a:lstStyle/>
           <a:p>
             <a:r>
-              <a:t>Part One examines first responder duties: preserving life, cordoning perimeters, and keeping unauthorized personnel outside the yellow tape.</a:t>
+              <a:t>Documentation must occur prior to disturbing a single artifact. If an item is moved before it is photographed with a scale, its legal probative weight in court is severely jeopardized.</a:t>
             </a:r>
           </a:p>
         </p:txBody>
@@ -932,7 +932,7 @@
           <a:lstStyle/>
           <a:p>
             <a:r>
-              <a:t>These statistics underscore that 85% of convictions rely on physical evidence, while 60% of technical acquittals result from procedural contamination.</a:t>
+              <a:t>Choosing the correct search pattern depends on the physical geography of the scene. A grid search provides the highest redundancy and minimizes the likelihood of overlooking minute trace fibers.</a:t>
             </a:r>
           </a:p>
         </p:txBody>
@@ -1002,7 +1002,7 @@
           <a:lstStyle/>
           <a:p>
             <a:r>
-              <a:t>Documentation requires three synchronized elements: comprehensive field notes, scaled forensic photographs, and triangulation sketches.</a:t>
+              <a:t>Biological evidence requires strict handling. Never seal wet bloodstains in plastic bags; moisture fosters mold growth that degrades DNA. All biological items must be air-dried and stored in paper containers.</a:t>
             </a:r>
           </a:p>
         </p:txBody>
@@ -1072,7 +1072,7 @@
           <a:lstStyle/>
           <a:p>
             <a:r>
-              <a:t>Here is the stark contrast between professional forensic rigor and fatal blunders that destroy legal cases in court.</a:t>
+              <a:t>An unbroken chain of custody is the absolute lifeblood of criminal prosecution. Any gap in the custody record can result in vital evidence being declared legally inadmissible.</a:t>
             </a:r>
           </a:p>
         </p:txBody>
@@ -1142,7 +1142,7 @@
           <a:lstStyle/>
           <a:p>
             <a:r>
-              <a:t>Part Two focuses on search patterns, scientific packaging rules, and strict adherence to Philippine Supreme Court evidentiary standards.</a:t>
+              <a:t>Every individual who touches an item of evidence must sign the custody receipt. From the discovering patrolman to the forensic chemist, every transfer must be documented with absolute precision.</a:t>
             </a:r>
           </a:p>
         </p:txBody>
@@ -1212,7 +1212,7 @@
           <a:lstStyle/>
           <a:p>
             <a:r>
-              <a:t>Search methods are chosen based on geography: grid for dense indoor scenes, strip search for large fields, and zone search for multi-room structures.</a:t>
+              <a:t>Defense attorneys vigorously attack gaps in the chain of custody. If the prosecution cannot prove where a knife was stored for 48 hours, the court may exclude it entirely.</a:t>
             </a:r>
           </a:p>
         </p:txBody>
@@ -4209,7 +4209,7 @@
 </file>
 
 <file path=ppt/slides/slide1.xml><?xml version="1.0" encoding="utf-8"?>
-<p:sld xmlns:a="http://schemas.openxmlformats.org/drawingml/2006/main" xmlns:p="http://schemas.openxmlformats.org/presentationml/2006/main" xmlns:r="http://schemas.openxmlformats.org/officeDocument/2006/relationships">
+<p:sld xmlns:p14="http://schemas.microsoft.com/office/powerpoint/2010/main" xmlns:a="http://schemas.openxmlformats.org/drawingml/2006/main" xmlns:p="http://schemas.openxmlformats.org/presentationml/2006/main" xmlns:r="http://schemas.openxmlformats.org/officeDocument/2006/relationships">
   <p:cSld>
     <p:spTree>
       <p:nvGrpSpPr>
@@ -4261,68 +4261,40 @@
           </a:p>
         </p:txBody>
       </p:sp>
-      <p:sp>
-        <p:nvSpPr>
-          <p:cNvPr id="3" name="Rounded Rectangle 2"/>
-          <p:cNvSpPr/>
+      <p:pic>
+        <p:nvPicPr>
+          <p:cNvPr id="3" name="!!Hero_Image" descr="csi_hero.png"/>
+          <p:cNvPicPr>
+            <a:picLocks noChangeAspect="1"/>
+          </p:cNvPicPr>
           <p:nvPr/>
-        </p:nvSpPr>
-        <p:spPr>
-          <a:xfrm>
-            <a:off x="731520" y="1097280"/>
-            <a:ext cx="3474720" cy="411480"/>
-          </a:xfrm>
-          <a:prstGeom prst="roundRect">
+        </p:nvPicPr>
+        <p:blipFill>
+          <a:blip r:embed="rId2"/>
+          <a:stretch>
+            <a:fillRect/>
+          </a:stretch>
+        </p:blipFill>
+        <p:spPr>
+          <a:xfrm>
+            <a:off x="6217920" y="731520"/>
+            <a:ext cx="5303520" cy="5394960"/>
+          </a:xfrm>
+          <a:prstGeom prst="rect">
             <a:avLst/>
           </a:prstGeom>
-          <a:solidFill>
-            <a:srgbClr val="8A94A6"/>
-          </a:solidFill>
-          <a:ln>
-            <a:noFill/>
-          </a:ln>
-        </p:spPr>
-        <p:style>
-          <a:lnRef idx="1">
-            <a:schemeClr val="accent1"/>
-          </a:lnRef>
-          <a:fillRef idx="3">
-            <a:schemeClr val="accent1"/>
-          </a:fillRef>
-          <a:effectRef idx="2">
-            <a:schemeClr val="accent1"/>
-          </a:effectRef>
-          <a:fontRef idx="minor">
-            <a:schemeClr val="lt1"/>
-          </a:fontRef>
-        </p:style>
-        <p:txBody>
-          <a:bodyPr rtlCol="0" anchor="ctr"/>
-          <a:lstStyle/>
-          <a:p>
-            <a:pPr algn="ctr">
-              <a:defRPr sz="1000" b="1">
-                <a:solidFill>
-                  <a:srgbClr val="F5F5F5"/>
-                </a:solidFill>
-              </a:defRPr>
-            </a:pPr>
-            <a:r>
-              <a:t>ACADEMIC KEYNOTE PRESENTATION</a:t>
-            </a:r>
-          </a:p>
-        </p:txBody>
-      </p:sp>
-      <p:sp>
-        <p:nvSpPr>
-          <p:cNvPr id="4" name="TextBox 3"/>
+        </p:spPr>
+      </p:pic>
+      <p:sp>
+        <p:nvSpPr>
+          <p:cNvPr id="4" name="!!Title_Card"/>
           <p:cNvSpPr txBox="1"/>
           <p:nvPr/>
         </p:nvSpPr>
         <p:spPr>
           <a:xfrm>
-            <a:off x="731520" y="1828800"/>
-            <a:ext cx="10515600" cy="2011680"/>
+            <a:off x="731520" y="1463040"/>
+            <a:ext cx="5303520" cy="4114800"/>
           </a:xfrm>
           <a:prstGeom prst="rect">
             <a:avLst/>
@@ -4330,94 +4302,57 @@
           <a:noFill/>
         </p:spPr>
         <p:txBody>
-          <a:bodyPr wrap="none">
+          <a:bodyPr wrap="square">
             <a:spAutoFit/>
           </a:bodyPr>
           <a:lstStyle/>
           <a:p>
             <a:pPr>
-              <a:defRPr sz="4000" b="1">
-                <a:solidFill>
-                  <a:srgbClr val="F5F5F5"/>
+              <a:defRPr sz="1200" b="1">
+                <a:solidFill>
+                  <a:srgbClr val="D97706"/>
                 </a:solidFill>
               </a:defRPr>
             </a:pPr>
             <a:r>
-              <a:t>Crime Scene Investigation: Forensic Basics</a:t>
-            </a:r>
-          </a:p>
-        </p:txBody>
-      </p:sp>
-      <p:sp>
-        <p:nvSpPr>
-          <p:cNvPr id="5" name="TextBox 4"/>
-          <p:cNvSpPr txBox="1"/>
-          <p:nvPr/>
-        </p:nvSpPr>
-        <p:spPr>
-          <a:xfrm>
-            <a:off x="731520" y="3931920"/>
-            <a:ext cx="10515600" cy="914400"/>
-          </a:xfrm>
-          <a:prstGeom prst="rect">
-            <a:avLst/>
-          </a:prstGeom>
-          <a:noFill/>
-        </p:spPr>
-        <p:txBody>
-          <a:bodyPr wrap="none">
-            <a:spAutoFit/>
-          </a:bodyPr>
-          <a:lstStyle/>
+              <a:t>CRIMINOLOGY &amp; FORENSIC SCIENCE</a:t>
+            </a:r>
+          </a:p>
           <a:p>
             <a:pPr>
-              <a:defRPr sz="2000">
-                <a:solidFill>
-                  <a:srgbClr val="C8102E"/>
+              <a:defRPr sz="3600" b="1">
+                <a:solidFill>
+                  <a:srgbClr val="FFFFFF"/>
                 </a:solidFill>
               </a:defRPr>
             </a:pPr>
             <a:r>
-              <a:t>Golden Rules, Physical Evidence Integrity, and Chain of Custody Protocols</a:t>
-            </a:r>
-          </a:p>
-        </p:txBody>
-      </p:sp>
-      <p:sp>
-        <p:nvSpPr>
-          <p:cNvPr id="6" name="TextBox 5"/>
-          <p:cNvSpPr txBox="1"/>
-          <p:nvPr/>
-        </p:nvSpPr>
-        <p:spPr>
-          <a:xfrm>
-            <a:off x="731520" y="5120640"/>
-            <a:ext cx="10515600" cy="914400"/>
-          </a:xfrm>
-          <a:prstGeom prst="rect">
-            <a:avLst/>
-          </a:prstGeom>
-          <a:noFill/>
-        </p:spPr>
-        <p:txBody>
-          <a:bodyPr wrap="none">
-            <a:spAutoFit/>
-          </a:bodyPr>
-          <a:lstStyle/>
+              <a:t>Crime Scene Investigation</a:t>
+            </a:r>
+          </a:p>
           <a:p>
             <a:pPr>
-              <a:defRPr sz="1400">
-                <a:solidFill>
-                  <a:srgbClr val="9CA3AF"/>
+              <a:defRPr sz="1500">
+                <a:solidFill>
+                  <a:srgbClr val="B4C8DC"/>
                 </a:solidFill>
               </a:defRPr>
             </a:pPr>
             <a:r>
-              <a:t>Presented by: Jhon Paulo V. Gascon  •  BSIT 2G</a:t>
-            </a:r>
+              <a:t>Forensic Methodology, Evidence Preservation, and Legal Chain of Custody</a:t>
+            </a:r>
+          </a:p>
+          <a:p>
             <a:br/>
-            <a:r>
-              <a:t>STI West Negros University  •  Academic Year 2026–2027</a:t>
+            <a:pPr>
+              <a:defRPr sz="1100">
+                <a:solidFill>
+                  <a:srgbClr val="8CA0B4"/>
+                </a:solidFill>
+              </a:defRPr>
+            </a:pPr>
+            <a:r>
+              <a:t>Presenter: Jhon Paulo Gascon • STI West Negros University</a:t>
             </a:r>
           </a:p>
         </p:txBody>
@@ -4427,14 +4362,14 @@
   <p:clrMapOvr>
     <a:masterClrMapping/>
   </p:clrMapOvr>
-  <p:transition spd="slow">
+  <p:transition spd="med">
     <p:fade/>
   </p:transition>
 </p:sld>
 </file>
 
 <file path=ppt/slides/slide10.xml><?xml version="1.0" encoding="utf-8"?>
-<p:sld xmlns:a="http://schemas.openxmlformats.org/drawingml/2006/main" xmlns:p="http://schemas.openxmlformats.org/presentationml/2006/main" xmlns:r="http://schemas.openxmlformats.org/officeDocument/2006/relationships">
+<p:sld xmlns:p14="http://schemas.microsoft.com/office/powerpoint/2010/main" xmlns:a="http://schemas.openxmlformats.org/drawingml/2006/main" xmlns:p="http://schemas.openxmlformats.org/presentationml/2006/main" xmlns:r="http://schemas.openxmlformats.org/officeDocument/2006/relationships">
   <p:cSld>
     <p:spTree>
       <p:nvGrpSpPr>
@@ -4494,8 +4429,8 @@
         </p:nvSpPr>
         <p:spPr>
           <a:xfrm>
-            <a:off x="731520" y="365760"/>
-            <a:ext cx="10058400" cy="365760"/>
+            <a:off x="731520" y="457200"/>
+            <a:ext cx="10698480" cy="1005840"/>
           </a:xfrm>
           <a:prstGeom prst="rect">
             <a:avLst/>
@@ -4503,7 +4438,7 @@
           <a:noFill/>
         </p:spPr>
         <p:txBody>
-          <a:bodyPr wrap="none">
+          <a:bodyPr wrap="square">
             <a:spAutoFit/>
           </a:bodyPr>
           <a:lstStyle/>
@@ -4511,106 +4446,48 @@
             <a:pPr>
               <a:defRPr sz="1100" b="1">
                 <a:solidFill>
-                  <a:srgbClr val="C8102E"/>
+                  <a:srgbClr val="D97706"/>
                 </a:solidFill>
               </a:defRPr>
             </a:pPr>
             <a:r>
-              <a:t>FINAL INSIGHTS</a:t>
-            </a:r>
-          </a:p>
-        </p:txBody>
-      </p:sp>
-      <p:sp>
-        <p:nvSpPr>
-          <p:cNvPr id="4" name="TextBox 3"/>
-          <p:cNvSpPr txBox="1"/>
-          <p:nvPr/>
-        </p:nvSpPr>
-        <p:spPr>
-          <a:xfrm>
-            <a:off x="731520" y="685800"/>
-            <a:ext cx="10515600" cy="731520"/>
-          </a:xfrm>
-          <a:prstGeom prst="rect">
-            <a:avLst/>
-          </a:prstGeom>
-          <a:noFill/>
-        </p:spPr>
-        <p:txBody>
-          <a:bodyPr wrap="none">
-            <a:spAutoFit/>
-          </a:bodyPr>
-          <a:lstStyle/>
+              <a:t>PROFESSIONAL PRINCIPLES</a:t>
+            </a:r>
+          </a:p>
           <a:p>
             <a:pPr>
-              <a:defRPr sz="2600" b="1">
-                <a:solidFill>
-                  <a:srgbClr val="F5F5F5"/>
+              <a:defRPr sz="2400" b="1">
+                <a:solidFill>
+                  <a:srgbClr val="FFFFFF"/>
                 </a:solidFill>
               </a:defRPr>
             </a:pPr>
             <a:r>
-              <a:t>Guiding Principles for Future Criminologists</a:t>
-            </a:r>
-          </a:p>
-        </p:txBody>
-      </p:sp>
-      <p:sp>
-        <p:nvSpPr>
-          <p:cNvPr id="5" name="TextBox 4"/>
-          <p:cNvSpPr txBox="1"/>
-          <p:nvPr/>
-        </p:nvSpPr>
-        <p:spPr>
-          <a:xfrm>
-            <a:off x="731520" y="6400800"/>
-            <a:ext cx="10728655" cy="320040"/>
-          </a:xfrm>
-          <a:prstGeom prst="rect">
-            <a:avLst/>
-          </a:prstGeom>
-          <a:noFill/>
-        </p:spPr>
-        <p:txBody>
-          <a:bodyPr wrap="none">
-            <a:spAutoFit/>
-          </a:bodyPr>
-          <a:lstStyle/>
-          <a:p>
-            <a:pPr>
-              <a:defRPr sz="900">
-                <a:solidFill>
-                  <a:srgbClr val="9CA3AF"/>
-                </a:solidFill>
-              </a:defRPr>
-            </a:pPr>
-            <a:r>
-              <a:t>STI West Negros University  •  Jhon Paulo V. Gascon  •  Slide 10 of 11</a:t>
-            </a:r>
-          </a:p>
-        </p:txBody>
-      </p:sp>
-      <p:sp>
-        <p:nvSpPr>
-          <p:cNvPr id="6" name="Rounded Rectangle 5"/>
+              <a:t>Essential Takeaways for Forensic Students</a:t>
+            </a:r>
+          </a:p>
+        </p:txBody>
+      </p:sp>
+      <p:sp>
+        <p:nvSpPr>
+          <p:cNvPr id="4" name="!!Card_1"/>
           <p:cNvSpPr/>
           <p:nvPr/>
         </p:nvSpPr>
         <p:spPr>
           <a:xfrm>
-            <a:off x="731520" y="1828800"/>
-            <a:ext cx="10728655" cy="1188720"/>
+            <a:off x="731520" y="1645920"/>
+            <a:ext cx="3291840" cy="4114800"/>
           </a:xfrm>
           <a:prstGeom prst="roundRect">
             <a:avLst/>
           </a:prstGeom>
           <a:solidFill>
-            <a:srgbClr val="1B2026"/>
+            <a:srgbClr val="1C2026"/>
           </a:solidFill>
           <a:ln w="19050">
             <a:solidFill>
-              <a:srgbClr val="C8102E"/>
+              <a:srgbClr val="D97706"/>
             </a:solidFill>
           </a:ln>
         </p:spPr>
@@ -4629,83 +4506,54 @@
           </a:fontRef>
         </p:style>
         <p:txBody>
-          <a:bodyPr rtlCol="0" anchor="ctr"/>
-          <a:lstStyle/>
-          <a:p>
-            <a:pPr algn="ctr"/>
-          </a:p>
-        </p:txBody>
-      </p:sp>
-      <p:sp>
-        <p:nvSpPr>
-          <p:cNvPr id="7" name="TextBox 6"/>
-          <p:cNvSpPr txBox="1"/>
-          <p:nvPr/>
-        </p:nvSpPr>
-        <p:spPr>
-          <a:xfrm>
-            <a:off x="1005840" y="2011680"/>
-            <a:ext cx="10241280" cy="822960"/>
-          </a:xfrm>
-          <a:prstGeom prst="rect">
-            <a:avLst/>
-          </a:prstGeom>
-          <a:noFill/>
-        </p:spPr>
-        <p:txBody>
-          <a:bodyPr wrap="square">
-            <a:spAutoFit/>
-          </a:bodyPr>
-          <a:lstStyle/>
+          <a:bodyPr rtlCol="0" anchor="ctr" wrap="square"/>
+          <a:lstStyle/>
+          <a:p>
+            <a:pPr algn="ctr">
+              <a:defRPr b="1" sz="1500">
+                <a:solidFill>
+                  <a:srgbClr val="D97706"/>
+                </a:solidFill>
+              </a:defRPr>
+            </a:pPr>
+            <a:r>
+              <a:t>Scientific Objectivity</a:t>
+            </a:r>
+          </a:p>
           <a:p>
             <a:pPr>
-              <a:defRPr sz="1800" b="1">
-                <a:solidFill>
-                  <a:srgbClr val="C8102E"/>
+              <a:defRPr sz="1100">
+                <a:solidFill>
+                  <a:srgbClr val="F0F0F0"/>
                 </a:solidFill>
               </a:defRPr>
             </a:pPr>
             <a:r>
-              <a:t>Integrity Above All</a:t>
-            </a:r>
-          </a:p>
-          <a:p>
-            <a:pPr>
-              <a:spcBef>
-                <a:spcPts val="300"/>
-              </a:spcBef>
-              <a:defRPr sz="1300">
-                <a:solidFill>
-                  <a:srgbClr val="F5F5F5"/>
-                </a:solidFill>
-              </a:defRPr>
-            </a:pPr>
-            <a:r>
-              <a:t>Forensic scientists serve truth, not the prosecution or defense.</a:t>
-            </a:r>
-          </a:p>
-        </p:txBody>
-      </p:sp>
-      <p:sp>
-        <p:nvSpPr>
-          <p:cNvPr id="8" name="Rounded Rectangle 7"/>
+              <a:t>Investigators gather objective facts without bias, regardless of public pressure or premature suspect theories.</a:t>
+            </a:r>
+          </a:p>
+        </p:txBody>
+      </p:sp>
+      <p:sp>
+        <p:nvSpPr>
+          <p:cNvPr id="5" name="!!Card_2"/>
           <p:cNvSpPr/>
           <p:nvPr/>
         </p:nvSpPr>
         <p:spPr>
           <a:xfrm>
-            <a:off x="731520" y="3200400"/>
-            <a:ext cx="10728655" cy="1188720"/>
+            <a:off x="4389120" y="1645920"/>
+            <a:ext cx="3291840" cy="4114800"/>
           </a:xfrm>
           <a:prstGeom prst="roundRect">
             <a:avLst/>
           </a:prstGeom>
           <a:solidFill>
-            <a:srgbClr val="1B2026"/>
+            <a:srgbClr val="1C2026"/>
           </a:solidFill>
           <a:ln w="19050">
             <a:solidFill>
-              <a:srgbClr val="C8102E"/>
+              <a:srgbClr val="D97706"/>
             </a:solidFill>
           </a:ln>
         </p:spPr>
@@ -4724,83 +4572,54 @@
           </a:fontRef>
         </p:style>
         <p:txBody>
-          <a:bodyPr rtlCol="0" anchor="ctr"/>
-          <a:lstStyle/>
-          <a:p>
-            <a:pPr algn="ctr"/>
-          </a:p>
-        </p:txBody>
-      </p:sp>
-      <p:sp>
-        <p:nvSpPr>
-          <p:cNvPr id="9" name="TextBox 8"/>
-          <p:cNvSpPr txBox="1"/>
-          <p:nvPr/>
-        </p:nvSpPr>
-        <p:spPr>
-          <a:xfrm>
-            <a:off x="1005840" y="3383280"/>
-            <a:ext cx="10241280" cy="822960"/>
-          </a:xfrm>
-          <a:prstGeom prst="rect">
-            <a:avLst/>
-          </a:prstGeom>
-          <a:noFill/>
-        </p:spPr>
-        <p:txBody>
-          <a:bodyPr wrap="square">
-            <a:spAutoFit/>
-          </a:bodyPr>
-          <a:lstStyle/>
+          <a:bodyPr rtlCol="0" anchor="ctr" wrap="square"/>
+          <a:lstStyle/>
+          <a:p>
+            <a:pPr algn="ctr">
+              <a:defRPr b="1" sz="1500">
+                <a:solidFill>
+                  <a:srgbClr val="D97706"/>
+                </a:solidFill>
+              </a:defRPr>
+            </a:pPr>
+            <a:r>
+              <a:t>Meticulous Precision</a:t>
+            </a:r>
+          </a:p>
           <a:p>
             <a:pPr>
-              <a:defRPr sz="1800" b="1">
-                <a:solidFill>
-                  <a:srgbClr val="C8102E"/>
+              <a:defRPr sz="1100">
+                <a:solidFill>
+                  <a:srgbClr val="F0F0F0"/>
                 </a:solidFill>
               </a:defRPr>
             </a:pPr>
             <a:r>
-              <a:t>Strict Chain of Custody</a:t>
-            </a:r>
-          </a:p>
-          <a:p>
-            <a:pPr>
-              <a:spcBef>
-                <a:spcPts val="300"/>
-              </a:spcBef>
-              <a:defRPr sz="1300">
-                <a:solidFill>
-                  <a:srgbClr val="F5F5F5"/>
-                </a:solidFill>
-              </a:defRPr>
-            </a:pPr>
-            <a:r>
-              <a:t>Every officer touching evidence must sign and document reason.</a:t>
-            </a:r>
-          </a:p>
-        </p:txBody>
-      </p:sp>
-      <p:sp>
-        <p:nvSpPr>
-          <p:cNvPr id="10" name="Rounded Rectangle 9"/>
+              <a:t>Treat every millimeter of a crime scene as vital historical testimony waiting to be interpreted.</a:t>
+            </a:r>
+          </a:p>
+        </p:txBody>
+      </p:sp>
+      <p:sp>
+        <p:nvSpPr>
+          <p:cNvPr id="6" name="!!Card_3"/>
           <p:cNvSpPr/>
           <p:nvPr/>
         </p:nvSpPr>
         <p:spPr>
           <a:xfrm>
-            <a:off x="731520" y="4572000"/>
-            <a:ext cx="10728655" cy="1188720"/>
+            <a:off x="8046720" y="1645920"/>
+            <a:ext cx="3291840" cy="4114800"/>
           </a:xfrm>
           <a:prstGeom prst="roundRect">
             <a:avLst/>
           </a:prstGeom>
           <a:solidFill>
-            <a:srgbClr val="1B2026"/>
+            <a:srgbClr val="1C2026"/>
           </a:solidFill>
           <a:ln w="19050">
             <a:solidFill>
-              <a:srgbClr val="C8102E"/>
+              <a:srgbClr val="D97706"/>
             </a:solidFill>
           </a:ln>
         </p:spPr>
@@ -4819,59 +4638,30 @@
           </a:fontRef>
         </p:style>
         <p:txBody>
-          <a:bodyPr rtlCol="0" anchor="ctr"/>
-          <a:lstStyle/>
-          <a:p>
-            <a:pPr algn="ctr"/>
-          </a:p>
-        </p:txBody>
-      </p:sp>
-      <p:sp>
-        <p:nvSpPr>
-          <p:cNvPr id="11" name="TextBox 10"/>
-          <p:cNvSpPr txBox="1"/>
-          <p:nvPr/>
-        </p:nvSpPr>
-        <p:spPr>
-          <a:xfrm>
-            <a:off x="1005840" y="4754880"/>
-            <a:ext cx="10241280" cy="822960"/>
-          </a:xfrm>
-          <a:prstGeom prst="rect">
-            <a:avLst/>
-          </a:prstGeom>
-          <a:noFill/>
-        </p:spPr>
-        <p:txBody>
-          <a:bodyPr wrap="square">
-            <a:spAutoFit/>
-          </a:bodyPr>
-          <a:lstStyle/>
+          <a:bodyPr rtlCol="0" anchor="ctr" wrap="square"/>
+          <a:lstStyle/>
+          <a:p>
+            <a:pPr algn="ctr">
+              <a:defRPr b="1" sz="1500">
+                <a:solidFill>
+                  <a:srgbClr val="D97706"/>
+                </a:solidFill>
+              </a:defRPr>
+            </a:pPr>
+            <a:r>
+              <a:t>Ethical Integrity</a:t>
+            </a:r>
+          </a:p>
           <a:p>
             <a:pPr>
-              <a:defRPr sz="1800" b="1">
-                <a:solidFill>
-                  <a:srgbClr val="C8102E"/>
+              <a:defRPr sz="1100">
+                <a:solidFill>
+                  <a:srgbClr val="F0F0F0"/>
                 </a:solidFill>
               </a:defRPr>
             </a:pPr>
             <a:r>
-              <a:t>Continuous Documentation</a:t>
-            </a:r>
-          </a:p>
-          <a:p>
-            <a:pPr>
-              <a:spcBef>
-                <a:spcPts val="300"/>
-              </a:spcBef>
-              <a:defRPr sz="1300">
-                <a:solidFill>
-                  <a:srgbClr val="F5F5F5"/>
-                </a:solidFill>
-              </a:defRPr>
-            </a:pPr>
-            <a:r>
-              <a:t>If it is not written down in field notes, it legally did not happen.</a:t>
+              <a:t>The pursuit of justice requires uncompromising adherence to statutory law, human rights, and forensic rigor.</a:t>
             </a:r>
           </a:p>
         </p:txBody>
@@ -4888,7 +4678,7 @@
 </file>
 
 <file path=ppt/slides/slide11.xml><?xml version="1.0" encoding="utf-8"?>
-<p:sld xmlns:a="http://schemas.openxmlformats.org/drawingml/2006/main" xmlns:p="http://schemas.openxmlformats.org/presentationml/2006/main" xmlns:r="http://schemas.openxmlformats.org/officeDocument/2006/relationships">
+<p:sld xmlns:p14="http://schemas.microsoft.com/office/powerpoint/2010/main" xmlns:a="http://schemas.openxmlformats.org/drawingml/2006/main" xmlns:p="http://schemas.openxmlformats.org/presentationml/2006/main" xmlns:r="http://schemas.openxmlformats.org/officeDocument/2006/relationships">
   <p:cSld>
     <p:spTree>
       <p:nvGrpSpPr>
@@ -4940,16 +4730,40 @@
           </a:p>
         </p:txBody>
       </p:sp>
-      <p:sp>
-        <p:nvSpPr>
-          <p:cNvPr id="3" name="TextBox 2"/>
+      <p:pic>
+        <p:nvPicPr>
+          <p:cNvPr id="3" name="!!Hero_Image" descr="csi_closing.png"/>
+          <p:cNvPicPr>
+            <a:picLocks noChangeAspect="1"/>
+          </p:cNvPicPr>
+          <p:nvPr/>
+        </p:nvPicPr>
+        <p:blipFill>
+          <a:blip r:embed="rId2"/>
+          <a:stretch>
+            <a:fillRect/>
+          </a:stretch>
+        </p:blipFill>
+        <p:spPr>
+          <a:xfrm>
+            <a:off x="6217920" y="731520"/>
+            <a:ext cx="5303520" cy="5394960"/>
+          </a:xfrm>
+          <a:prstGeom prst="rect">
+            <a:avLst/>
+          </a:prstGeom>
+        </p:spPr>
+      </p:pic>
+      <p:sp>
+        <p:nvSpPr>
+          <p:cNvPr id="4" name="!!Title_Card"/>
           <p:cNvSpPr txBox="1"/>
           <p:nvPr/>
         </p:nvSpPr>
         <p:spPr>
           <a:xfrm>
-            <a:off x="731520" y="365760"/>
-            <a:ext cx="10058400" cy="365760"/>
+            <a:off x="731520" y="1463040"/>
+            <a:ext cx="5303520" cy="4114800"/>
           </a:xfrm>
           <a:prstGeom prst="rect">
             <a:avLst/>
@@ -4957,812 +4771,57 @@
           <a:noFill/>
         </p:spPr>
         <p:txBody>
-          <a:bodyPr wrap="none">
-            <a:spAutoFit/>
-          </a:bodyPr>
-          <a:lstStyle/>
-          <a:p>
-            <a:pPr>
-              <a:defRPr sz="1100" b="1">
-                <a:solidFill>
-                  <a:srgbClr val="C8102E"/>
-                </a:solidFill>
-              </a:defRPr>
-            </a:pPr>
-            <a:r>
-              <a:t>SCHOLARLY DOCUMENTATION</a:t>
-            </a:r>
-          </a:p>
-        </p:txBody>
-      </p:sp>
-      <p:sp>
-        <p:nvSpPr>
-          <p:cNvPr id="4" name="TextBox 3"/>
-          <p:cNvSpPr txBox="1"/>
-          <p:nvPr/>
-        </p:nvSpPr>
-        <p:spPr>
-          <a:xfrm>
-            <a:off x="731520" y="685800"/>
-            <a:ext cx="10515600" cy="731520"/>
-          </a:xfrm>
-          <a:prstGeom prst="rect">
-            <a:avLst/>
-          </a:prstGeom>
-          <a:noFill/>
-        </p:spPr>
-        <p:txBody>
-          <a:bodyPr wrap="none">
-            <a:spAutoFit/>
-          </a:bodyPr>
-          <a:lstStyle/>
-          <a:p>
-            <a:pPr>
-              <a:defRPr sz="2600" b="1">
-                <a:solidFill>
-                  <a:srgbClr val="F5F5F5"/>
-                </a:solidFill>
-              </a:defRPr>
-            </a:pPr>
-            <a:r>
-              <a:t>Legal &amp; Forensic References (Rule 128 Rules of Court)</a:t>
-            </a:r>
-          </a:p>
-        </p:txBody>
-      </p:sp>
-      <p:sp>
-        <p:nvSpPr>
-          <p:cNvPr id="5" name="TextBox 4"/>
-          <p:cNvSpPr txBox="1"/>
-          <p:nvPr/>
-        </p:nvSpPr>
-        <p:spPr>
-          <a:xfrm>
-            <a:off x="731520" y="6400800"/>
-            <a:ext cx="10728655" cy="320040"/>
-          </a:xfrm>
-          <a:prstGeom prst="rect">
-            <a:avLst/>
-          </a:prstGeom>
-          <a:noFill/>
-        </p:spPr>
-        <p:txBody>
-          <a:bodyPr wrap="none">
-            <a:spAutoFit/>
-          </a:bodyPr>
-          <a:lstStyle/>
-          <a:p>
-            <a:pPr>
-              <a:defRPr sz="900">
-                <a:solidFill>
-                  <a:srgbClr val="9CA3AF"/>
-                </a:solidFill>
-              </a:defRPr>
-            </a:pPr>
-            <a:r>
-              <a:t>STI West Negros University  •  Jhon Paulo V. Gascon  •  Slide 11 of 11</a:t>
-            </a:r>
-          </a:p>
-        </p:txBody>
-      </p:sp>
-      <p:sp>
-        <p:nvSpPr>
-          <p:cNvPr id="6" name="Rounded Rectangle 5"/>
-          <p:cNvSpPr/>
-          <p:nvPr/>
-        </p:nvSpPr>
-        <p:spPr>
-          <a:xfrm>
-            <a:off x="731520" y="1828800"/>
-            <a:ext cx="10728655" cy="4114800"/>
-          </a:xfrm>
-          <a:prstGeom prst="roundRect">
-            <a:avLst/>
-          </a:prstGeom>
-          <a:solidFill>
-            <a:srgbClr val="1B2026"/>
-          </a:solidFill>
-          <a:ln w="12700">
-            <a:solidFill>
-              <a:srgbClr val="9CA3AF"/>
-            </a:solidFill>
-          </a:ln>
-        </p:spPr>
-        <p:style>
-          <a:lnRef idx="1">
-            <a:schemeClr val="accent1"/>
-          </a:lnRef>
-          <a:fillRef idx="3">
-            <a:schemeClr val="accent1"/>
-          </a:fillRef>
-          <a:effectRef idx="2">
-            <a:schemeClr val="accent1"/>
-          </a:effectRef>
-          <a:fontRef idx="minor">
-            <a:schemeClr val="lt1"/>
-          </a:fontRef>
-        </p:style>
-        <p:txBody>
-          <a:bodyPr rtlCol="0" anchor="ctr"/>
-          <a:lstStyle/>
-          <a:p>
-            <a:pPr algn="ctr"/>
-          </a:p>
-        </p:txBody>
-      </p:sp>
-      <p:sp>
-        <p:nvSpPr>
-          <p:cNvPr id="7" name="TextBox 6"/>
-          <p:cNvSpPr txBox="1"/>
-          <p:nvPr/>
-        </p:nvSpPr>
-        <p:spPr>
-          <a:xfrm>
-            <a:off x="1097280" y="2103120"/>
-            <a:ext cx="10058400" cy="3566160"/>
-          </a:xfrm>
-          <a:prstGeom prst="rect">
-            <a:avLst/>
-          </a:prstGeom>
-          <a:noFill/>
-        </p:spPr>
-        <p:txBody>
           <a:bodyPr wrap="square">
             <a:spAutoFit/>
           </a:bodyPr>
           <a:lstStyle/>
           <a:p>
             <a:pPr>
-              <a:spcBef>
-                <a:spcPts val="1400"/>
-              </a:spcBef>
-              <a:defRPr sz="1300">
-                <a:solidFill>
-                  <a:srgbClr val="F5F5F5"/>
+              <a:defRPr sz="3200" b="1">
+                <a:solidFill>
+                  <a:srgbClr val="FFFFFF"/>
                 </a:solidFill>
               </a:defRPr>
             </a:pPr>
             <a:r>
-              <a:t>•  Philippine National Police. (2014). Criminal investigation manual (Revised ed.). PNP Directorate for Investigation and Detective Management.</a:t>
+              <a:t>Forensic Excellence in the Pursuit of Justice</a:t>
             </a:r>
           </a:p>
           <a:p>
             <a:pPr>
-              <a:spcBef>
-                <a:spcPts val="1400"/>
-              </a:spcBef>
-              <a:defRPr sz="1300">
-                <a:solidFill>
-                  <a:srgbClr val="F5F5F5"/>
+              <a:defRPr sz="1400">
+                <a:solidFill>
+                  <a:srgbClr val="D97706"/>
                 </a:solidFill>
               </a:defRPr>
             </a:pPr>
             <a:r>
-              <a:t>•  Saferstein, R. (2018). Criminalistics: An introduction to forensic science (12th ed.). Pearson Education.</a:t>
-            </a:r>
-          </a:p>
-          <a:p>
+              <a:t>Where Science Meets the Law to Protect Human Rights</a:t>
+            </a:r>
+          </a:p>
+          <a:p>
+            <a:br/>
             <a:pPr>
-              <a:spcBef>
-                <a:spcPts val="1400"/>
-              </a:spcBef>
-              <a:defRPr sz="1300">
-                <a:solidFill>
-                  <a:srgbClr val="F5F5F5"/>
+              <a:defRPr sz="1000">
+                <a:solidFill>
+                  <a:srgbClr val="96AABE"/>
                 </a:solidFill>
               </a:defRPr>
             </a:pPr>
             <a:r>
-              <a:t>•  Supreme Court of the Philippines. (2019). Revised rules on evidence (A.M. No. 19-08-15-SC). Rules of Court.</a:t>
-            </a:r>
-          </a:p>
-        </p:txBody>
-      </p:sp>
-    </p:spTree>
-  </p:cSld>
-  <p:clrMapOvr>
-    <a:masterClrMapping/>
-  </p:clrMapOvr>
-  <p:transition spd="slow">
-    <p:fade/>
-  </p:transition>
-</p:sld>
-</file>
-
-<file path=ppt/slides/slide2.xml><?xml version="1.0" encoding="utf-8"?>
-<p:sld xmlns:a="http://schemas.openxmlformats.org/drawingml/2006/main" xmlns:p="http://schemas.openxmlformats.org/presentationml/2006/main" xmlns:r="http://schemas.openxmlformats.org/officeDocument/2006/relationships">
-  <p:cSld>
-    <p:spTree>
-      <p:nvGrpSpPr>
-        <p:cNvPr id="1" name=""/>
-        <p:cNvGrpSpPr/>
-        <p:nvPr/>
-      </p:nvGrpSpPr>
-      <p:grpSpPr/>
-      <p:sp>
-        <p:nvSpPr>
-          <p:cNvPr id="2" name="Rectangle 1"/>
-          <p:cNvSpPr/>
-          <p:nvPr/>
-        </p:nvSpPr>
-        <p:spPr>
-          <a:xfrm>
-            <a:off x="0" y="0"/>
-            <a:ext cx="12191695" cy="6858000"/>
-          </a:xfrm>
-          <a:prstGeom prst="rect">
-            <a:avLst/>
-          </a:prstGeom>
-          <a:solidFill>
-            <a:srgbClr val="111418"/>
-          </a:solidFill>
-          <a:ln>
-            <a:noFill/>
-          </a:ln>
-        </p:spPr>
-        <p:style>
-          <a:lnRef idx="1">
-            <a:schemeClr val="accent1"/>
-          </a:lnRef>
-          <a:fillRef idx="3">
-            <a:schemeClr val="accent1"/>
-          </a:fillRef>
-          <a:effectRef idx="2">
-            <a:schemeClr val="accent1"/>
-          </a:effectRef>
-          <a:fontRef idx="minor">
-            <a:schemeClr val="lt1"/>
-          </a:fontRef>
-        </p:style>
-        <p:txBody>
-          <a:bodyPr rtlCol="0" anchor="ctr"/>
-          <a:lstStyle/>
-          <a:p>
-            <a:pPr algn="ctr"/>
-          </a:p>
-        </p:txBody>
-      </p:sp>
-      <p:sp>
-        <p:nvSpPr>
-          <p:cNvPr id="3" name="TextBox 2"/>
-          <p:cNvSpPr txBox="1"/>
-          <p:nvPr/>
-        </p:nvSpPr>
-        <p:spPr>
-          <a:xfrm>
-            <a:off x="731520" y="365760"/>
-            <a:ext cx="10058400" cy="365760"/>
-          </a:xfrm>
-          <a:prstGeom prst="rect">
-            <a:avLst/>
-          </a:prstGeom>
-          <a:noFill/>
-        </p:spPr>
-        <p:txBody>
-          <a:bodyPr wrap="none">
-            <a:spAutoFit/>
-          </a:bodyPr>
-          <a:lstStyle/>
-          <a:p>
-            <a:pPr>
-              <a:defRPr sz="1100" b="1">
-                <a:solidFill>
-                  <a:srgbClr val="C8102E"/>
-                </a:solidFill>
-              </a:defRPr>
-            </a:pPr>
-            <a:r>
-              <a:t>STRUCTURE &amp; OVERVIEW</a:t>
-            </a:r>
-          </a:p>
-        </p:txBody>
-      </p:sp>
-      <p:sp>
-        <p:nvSpPr>
-          <p:cNvPr id="4" name="TextBox 3"/>
-          <p:cNvSpPr txBox="1"/>
-          <p:nvPr/>
-        </p:nvSpPr>
-        <p:spPr>
-          <a:xfrm>
-            <a:off x="731520" y="685800"/>
-            <a:ext cx="10515600" cy="731520"/>
-          </a:xfrm>
-          <a:prstGeom prst="rect">
-            <a:avLst/>
-          </a:prstGeom>
-          <a:noFill/>
-        </p:spPr>
-        <p:txBody>
-          <a:bodyPr wrap="none">
-            <a:spAutoFit/>
-          </a:bodyPr>
-          <a:lstStyle/>
-          <a:p>
-            <a:pPr>
-              <a:defRPr sz="2600" b="1">
-                <a:solidFill>
-                  <a:srgbClr val="F5F5F5"/>
-                </a:solidFill>
-              </a:defRPr>
-            </a:pPr>
-            <a:r>
-              <a:t>Presentation Roadmap</a:t>
-            </a:r>
-          </a:p>
-        </p:txBody>
-      </p:sp>
-      <p:sp>
-        <p:nvSpPr>
-          <p:cNvPr id="5" name="TextBox 4"/>
-          <p:cNvSpPr txBox="1"/>
-          <p:nvPr/>
-        </p:nvSpPr>
-        <p:spPr>
-          <a:xfrm>
-            <a:off x="731520" y="6400800"/>
-            <a:ext cx="10728655" cy="320040"/>
-          </a:xfrm>
-          <a:prstGeom prst="rect">
-            <a:avLst/>
-          </a:prstGeom>
-          <a:noFill/>
-        </p:spPr>
-        <p:txBody>
-          <a:bodyPr wrap="none">
-            <a:spAutoFit/>
-          </a:bodyPr>
-          <a:lstStyle/>
-          <a:p>
-            <a:pPr>
-              <a:defRPr sz="900">
-                <a:solidFill>
-                  <a:srgbClr val="9CA3AF"/>
-                </a:solidFill>
-              </a:defRPr>
-            </a:pPr>
-            <a:r>
-              <a:t>STI West Negros University  •  Jhon Paulo V. Gascon  •  Slide 2 of 11</a:t>
-            </a:r>
-          </a:p>
-        </p:txBody>
-      </p:sp>
-      <p:sp>
-        <p:nvSpPr>
-          <p:cNvPr id="6" name="Rounded Rectangle 5"/>
-          <p:cNvSpPr/>
-          <p:nvPr/>
-        </p:nvSpPr>
-        <p:spPr>
-          <a:xfrm>
-            <a:off x="731520" y="1828800"/>
-            <a:ext cx="2514600" cy="4114800"/>
-          </a:xfrm>
-          <a:prstGeom prst="roundRect">
-            <a:avLst/>
-          </a:prstGeom>
-          <a:solidFill>
-            <a:srgbClr val="1B2026"/>
-          </a:solidFill>
-          <a:ln w="19050">
-            <a:solidFill>
-              <a:srgbClr val="C8102E"/>
-            </a:solidFill>
-          </a:ln>
-        </p:spPr>
-        <p:style>
-          <a:lnRef idx="1">
-            <a:schemeClr val="accent1"/>
-          </a:lnRef>
-          <a:fillRef idx="3">
-            <a:schemeClr val="accent1"/>
-          </a:fillRef>
-          <a:effectRef idx="2">
-            <a:schemeClr val="accent1"/>
-          </a:effectRef>
-          <a:fontRef idx="minor">
-            <a:schemeClr val="lt1"/>
-          </a:fontRef>
-        </p:style>
-        <p:txBody>
-          <a:bodyPr rtlCol="0" anchor="ctr"/>
-          <a:lstStyle/>
-          <a:p>
-            <a:pPr algn="ctr"/>
-          </a:p>
-        </p:txBody>
-      </p:sp>
-      <p:sp>
-        <p:nvSpPr>
-          <p:cNvPr id="7" name="TextBox 6"/>
-          <p:cNvSpPr txBox="1"/>
-          <p:nvPr/>
-        </p:nvSpPr>
-        <p:spPr>
-          <a:xfrm>
-            <a:off x="914400" y="2103120"/>
-            <a:ext cx="2148840" cy="3474720"/>
-          </a:xfrm>
-          <a:prstGeom prst="rect">
-            <a:avLst/>
-          </a:prstGeom>
-          <a:noFill/>
-        </p:spPr>
-        <p:txBody>
-          <a:bodyPr wrap="square">
-            <a:spAutoFit/>
-          </a:bodyPr>
-          <a:lstStyle/>
-          <a:p>
-            <a:pPr>
-              <a:defRPr sz="3600" b="1">
-                <a:solidFill>
-                  <a:srgbClr val="C8102E"/>
-                </a:solidFill>
-              </a:defRPr>
-            </a:pPr>
-            <a:r>
-              <a:t>01</a:t>
-            </a:r>
-          </a:p>
-          <a:p>
-            <a:pPr>
-              <a:spcBef>
-                <a:spcPts val="1400"/>
-              </a:spcBef>
-              <a:defRPr sz="1600" b="1">
-                <a:solidFill>
-                  <a:srgbClr val="F5F5F5"/>
-                </a:solidFill>
-              </a:defRPr>
-            </a:pPr>
-            <a:r>
-              <a:t>The Golden Rule of CSI</a:t>
-            </a:r>
-          </a:p>
-          <a:p>
-            <a:pPr>
-              <a:spcBef>
-                <a:spcPts val="1000"/>
-              </a:spcBef>
-              <a:defRPr sz="1300">
-                <a:solidFill>
-                  <a:srgbClr val="9CA3AF"/>
-                </a:solidFill>
-              </a:defRPr>
-            </a:pPr>
-            <a:r>
-              <a:t>Preserving the scene from contamination and unauthorized entry</a:t>
-            </a:r>
-          </a:p>
-        </p:txBody>
-      </p:sp>
-      <p:sp>
-        <p:nvSpPr>
-          <p:cNvPr id="8" name="Rounded Rectangle 7"/>
-          <p:cNvSpPr/>
-          <p:nvPr/>
-        </p:nvSpPr>
-        <p:spPr>
-          <a:xfrm>
-            <a:off x="3429000" y="1828800"/>
-            <a:ext cx="2514600" cy="4114800"/>
-          </a:xfrm>
-          <a:prstGeom prst="roundRect">
-            <a:avLst/>
-          </a:prstGeom>
-          <a:solidFill>
-            <a:srgbClr val="1B2026"/>
-          </a:solidFill>
-          <a:ln w="19050">
-            <a:solidFill>
-              <a:srgbClr val="C8102E"/>
-            </a:solidFill>
-          </a:ln>
-        </p:spPr>
-        <p:style>
-          <a:lnRef idx="1">
-            <a:schemeClr val="accent1"/>
-          </a:lnRef>
-          <a:fillRef idx="3">
-            <a:schemeClr val="accent1"/>
-          </a:fillRef>
-          <a:effectRef idx="2">
-            <a:schemeClr val="accent1"/>
-          </a:effectRef>
-          <a:fontRef idx="minor">
-            <a:schemeClr val="lt1"/>
-          </a:fontRef>
-        </p:style>
-        <p:txBody>
-          <a:bodyPr rtlCol="0" anchor="ctr"/>
-          <a:lstStyle/>
-          <a:p>
-            <a:pPr algn="ctr"/>
-          </a:p>
-        </p:txBody>
-      </p:sp>
-      <p:sp>
-        <p:nvSpPr>
-          <p:cNvPr id="9" name="TextBox 8"/>
-          <p:cNvSpPr txBox="1"/>
-          <p:nvPr/>
-        </p:nvSpPr>
-        <p:spPr>
-          <a:xfrm>
-            <a:off x="3611880" y="2103120"/>
-            <a:ext cx="2148840" cy="3474720"/>
-          </a:xfrm>
-          <a:prstGeom prst="rect">
-            <a:avLst/>
-          </a:prstGeom>
-          <a:noFill/>
-        </p:spPr>
-        <p:txBody>
-          <a:bodyPr wrap="square">
-            <a:spAutoFit/>
-          </a:bodyPr>
-          <a:lstStyle/>
-          <a:p>
-            <a:pPr>
-              <a:defRPr sz="3600" b="1">
-                <a:solidFill>
-                  <a:srgbClr val="C8102E"/>
-                </a:solidFill>
-              </a:defRPr>
-            </a:pPr>
-            <a:r>
-              <a:t>02</a:t>
-            </a:r>
-          </a:p>
-          <a:p>
-            <a:pPr>
-              <a:spcBef>
-                <a:spcPts val="1400"/>
-              </a:spcBef>
-              <a:defRPr sz="1600" b="1">
-                <a:solidFill>
-                  <a:srgbClr val="F5F5F5"/>
-                </a:solidFill>
-              </a:defRPr>
-            </a:pPr>
-            <a:r>
-              <a:t>First Responder Duties</a:t>
-            </a:r>
-          </a:p>
-          <a:p>
-            <a:pPr>
-              <a:spcBef>
-                <a:spcPts val="1000"/>
-              </a:spcBef>
-              <a:defRPr sz="1300">
-                <a:solidFill>
-                  <a:srgbClr val="9CA3AF"/>
-                </a:solidFill>
-              </a:defRPr>
-            </a:pPr>
-            <a:r>
-              <a:t>Securing perimeter, medical aid, and witness segregation</a:t>
-            </a:r>
-          </a:p>
-        </p:txBody>
-      </p:sp>
-      <p:sp>
-        <p:nvSpPr>
-          <p:cNvPr id="10" name="Rounded Rectangle 9"/>
-          <p:cNvSpPr/>
-          <p:nvPr/>
-        </p:nvSpPr>
-        <p:spPr>
-          <a:xfrm>
-            <a:off x="6126480" y="1828800"/>
-            <a:ext cx="2514600" cy="4114800"/>
-          </a:xfrm>
-          <a:prstGeom prst="roundRect">
-            <a:avLst/>
-          </a:prstGeom>
-          <a:solidFill>
-            <a:srgbClr val="1B2026"/>
-          </a:solidFill>
-          <a:ln w="19050">
-            <a:solidFill>
-              <a:srgbClr val="C8102E"/>
-            </a:solidFill>
-          </a:ln>
-        </p:spPr>
-        <p:style>
-          <a:lnRef idx="1">
-            <a:schemeClr val="accent1"/>
-          </a:lnRef>
-          <a:fillRef idx="3">
-            <a:schemeClr val="accent1"/>
-          </a:fillRef>
-          <a:effectRef idx="2">
-            <a:schemeClr val="accent1"/>
-          </a:effectRef>
-          <a:fontRef idx="minor">
-            <a:schemeClr val="lt1"/>
-          </a:fontRef>
-        </p:style>
-        <p:txBody>
-          <a:bodyPr rtlCol="0" anchor="ctr"/>
-          <a:lstStyle/>
-          <a:p>
-            <a:pPr algn="ctr"/>
-          </a:p>
-        </p:txBody>
-      </p:sp>
-      <p:sp>
-        <p:nvSpPr>
-          <p:cNvPr id="11" name="TextBox 10"/>
-          <p:cNvSpPr txBox="1"/>
-          <p:nvPr/>
-        </p:nvSpPr>
-        <p:spPr>
-          <a:xfrm>
-            <a:off x="6309360" y="2103120"/>
-            <a:ext cx="2148840" cy="3474720"/>
-          </a:xfrm>
-          <a:prstGeom prst="rect">
-            <a:avLst/>
-          </a:prstGeom>
-          <a:noFill/>
-        </p:spPr>
-        <p:txBody>
-          <a:bodyPr wrap="square">
-            <a:spAutoFit/>
-          </a:bodyPr>
-          <a:lstStyle/>
-          <a:p>
-            <a:pPr>
-              <a:defRPr sz="3600" b="1">
-                <a:solidFill>
-                  <a:srgbClr val="C8102E"/>
-                </a:solidFill>
-              </a:defRPr>
-            </a:pPr>
-            <a:r>
-              <a:t>03</a:t>
-            </a:r>
-          </a:p>
-          <a:p>
-            <a:pPr>
-              <a:spcBef>
-                <a:spcPts val="1400"/>
-              </a:spcBef>
-              <a:defRPr sz="1600" b="1">
-                <a:solidFill>
-                  <a:srgbClr val="F5F5F5"/>
-                </a:solidFill>
-              </a:defRPr>
-            </a:pPr>
-            <a:r>
-              <a:t>Systematic Search &amp; Evidence</a:t>
-            </a:r>
-          </a:p>
-          <a:p>
-            <a:pPr>
-              <a:spcBef>
-                <a:spcPts val="1000"/>
-              </a:spcBef>
-              <a:defRPr sz="1300">
-                <a:solidFill>
-                  <a:srgbClr val="9CA3AF"/>
-                </a:solidFill>
-              </a:defRPr>
-            </a:pPr>
-            <a:r>
-              <a:t>Strip, spiral, and grid search methods; packaging rules</a:t>
-            </a:r>
-          </a:p>
-        </p:txBody>
-      </p:sp>
-      <p:sp>
-        <p:nvSpPr>
-          <p:cNvPr id="12" name="Rounded Rectangle 11"/>
-          <p:cNvSpPr/>
-          <p:nvPr/>
-        </p:nvSpPr>
-        <p:spPr>
-          <a:xfrm>
-            <a:off x="8823960" y="1828800"/>
-            <a:ext cx="2514600" cy="4114800"/>
-          </a:xfrm>
-          <a:prstGeom prst="roundRect">
-            <a:avLst/>
-          </a:prstGeom>
-          <a:solidFill>
-            <a:srgbClr val="1B2026"/>
-          </a:solidFill>
-          <a:ln w="19050">
-            <a:solidFill>
-              <a:srgbClr val="C8102E"/>
-            </a:solidFill>
-          </a:ln>
-        </p:spPr>
-        <p:style>
-          <a:lnRef idx="1">
-            <a:schemeClr val="accent1"/>
-          </a:lnRef>
-          <a:fillRef idx="3">
-            <a:schemeClr val="accent1"/>
-          </a:fillRef>
-          <a:effectRef idx="2">
-            <a:schemeClr val="accent1"/>
-          </a:effectRef>
-          <a:fontRef idx="minor">
-            <a:schemeClr val="lt1"/>
-          </a:fontRef>
-        </p:style>
-        <p:txBody>
-          <a:bodyPr rtlCol="0" anchor="ctr"/>
-          <a:lstStyle/>
-          <a:p>
-            <a:pPr algn="ctr"/>
-          </a:p>
-        </p:txBody>
-      </p:sp>
-      <p:sp>
-        <p:nvSpPr>
-          <p:cNvPr id="13" name="TextBox 12"/>
-          <p:cNvSpPr txBox="1"/>
-          <p:nvPr/>
-        </p:nvSpPr>
-        <p:spPr>
-          <a:xfrm>
-            <a:off x="9006840" y="2103120"/>
-            <a:ext cx="2148840" cy="3474720"/>
-          </a:xfrm>
-          <a:prstGeom prst="rect">
-            <a:avLst/>
-          </a:prstGeom>
-          <a:noFill/>
-        </p:spPr>
-        <p:txBody>
-          <a:bodyPr wrap="square">
-            <a:spAutoFit/>
-          </a:bodyPr>
-          <a:lstStyle/>
-          <a:p>
-            <a:pPr>
-              <a:defRPr sz="3600" b="1">
-                <a:solidFill>
-                  <a:srgbClr val="C8102E"/>
-                </a:solidFill>
-              </a:defRPr>
-            </a:pPr>
-            <a:r>
-              <a:t>04</a:t>
-            </a:r>
-          </a:p>
-          <a:p>
-            <a:pPr>
-              <a:spcBef>
-                <a:spcPts val="1400"/>
-              </a:spcBef>
-              <a:defRPr sz="1600" b="1">
-                <a:solidFill>
-                  <a:srgbClr val="F5F5F5"/>
-                </a:solidFill>
-              </a:defRPr>
-            </a:pPr>
-            <a:r>
-              <a:t>Chain of Custody &amp; Court Room</a:t>
-            </a:r>
-          </a:p>
-          <a:p>
-            <a:pPr>
-              <a:spcBef>
-                <a:spcPts val="1000"/>
-              </a:spcBef>
-              <a:defRPr sz="1300">
-                <a:solidFill>
-                  <a:srgbClr val="9CA3AF"/>
-                </a:solidFill>
-              </a:defRPr>
-            </a:pPr>
-            <a:r>
-              <a:t>Documenting every transfer to guarantee judicial admissibility</a:t>
+              <a:t>Image &amp; Academic Credits:</a:t>
+            </a:r>
+            <a:br/>
+            <a:r>
+              <a:t>• Visual Assets: Custom 3D renders &amp; high-res vector graphics.</a:t>
+            </a:r>
+            <a:br/>
+            <a:r>
+              <a:t>• Research Citations: APA 7th academic standards.</a:t>
+            </a:r>
+            <a:br/>
+            <a:r>
+              <a:t>• STI West Negros University • BSIT Program 2026–2027</a:t>
             </a:r>
           </a:p>
         </p:txBody>
@@ -5778,8 +4837,8 @@
 </p:sld>
 </file>
 
-<file path=ppt/slides/slide3.xml><?xml version="1.0" encoding="utf-8"?>
-<p:sld xmlns:a="http://schemas.openxmlformats.org/drawingml/2006/main" xmlns:p="http://schemas.openxmlformats.org/presentationml/2006/main" xmlns:r="http://schemas.openxmlformats.org/officeDocument/2006/relationships">
+<file path=ppt/slides/slide2.xml><?xml version="1.0" encoding="utf-8"?>
+<p:sld xmlns:p14="http://schemas.microsoft.com/office/powerpoint/2010/main" xmlns:a="http://schemas.openxmlformats.org/drawingml/2006/main" xmlns:p="http://schemas.openxmlformats.org/presentationml/2006/main" xmlns:r="http://schemas.openxmlformats.org/officeDocument/2006/relationships">
   <p:cSld>
     <p:spTree>
       <p:nvGrpSpPr>
@@ -5839,8 +4898,8 @@
         </p:nvSpPr>
         <p:spPr>
           <a:xfrm>
-            <a:off x="731520" y="365760"/>
-            <a:ext cx="10058400" cy="365760"/>
+            <a:off x="731520" y="457200"/>
+            <a:ext cx="10698480" cy="1005840"/>
           </a:xfrm>
           <a:prstGeom prst="rect">
             <a:avLst/>
@@ -5848,7 +4907,7 @@
           <a:noFill/>
         </p:spPr>
         <p:txBody>
-          <a:bodyPr wrap="none">
+          <a:bodyPr wrap="square">
             <a:spAutoFit/>
           </a:bodyPr>
           <a:lstStyle/>
@@ -5856,106 +4915,72 @@
             <a:pPr>
               <a:defRPr sz="1100" b="1">
                 <a:solidFill>
-                  <a:srgbClr val="C8102E"/>
+                  <a:srgbClr val="D97706"/>
                 </a:solidFill>
               </a:defRPr>
             </a:pPr>
             <a:r>
-              <a:t>KEY TAKEAWAY</a:t>
-            </a:r>
-          </a:p>
-        </p:txBody>
-      </p:sp>
-      <p:sp>
-        <p:nvSpPr>
-          <p:cNvPr id="4" name="TextBox 3"/>
-          <p:cNvSpPr txBox="1"/>
+              <a:t>FOUNDATIONAL LAW</a:t>
+            </a:r>
+          </a:p>
+          <a:p>
+            <a:pPr>
+              <a:defRPr sz="2400" b="1">
+                <a:solidFill>
+                  <a:srgbClr val="FFFFFF"/>
+                </a:solidFill>
+              </a:defRPr>
+            </a:pPr>
+            <a:r>
+              <a:t>Locard's Exchange Principle</a:t>
+            </a:r>
+          </a:p>
+        </p:txBody>
+      </p:sp>
+      <p:pic>
+        <p:nvPicPr>
+          <p:cNvPr id="4" name="!!Content_Image" descr="csi_locard.png"/>
+          <p:cNvPicPr>
+            <a:picLocks noChangeAspect="1"/>
+          </p:cNvPicPr>
           <p:nvPr/>
-        </p:nvSpPr>
-        <p:spPr>
-          <a:xfrm>
-            <a:off x="731520" y="685800"/>
-            <a:ext cx="10515600" cy="731520"/>
+        </p:nvPicPr>
+        <p:blipFill>
+          <a:blip r:embed="rId2"/>
+          <a:stretch>
+            <a:fillRect/>
+          </a:stretch>
+        </p:blipFill>
+        <p:spPr>
+          <a:xfrm>
+            <a:off x="731520" y="1645920"/>
+            <a:ext cx="5029200" cy="4389120"/>
           </a:xfrm>
           <a:prstGeom prst="rect">
             <a:avLst/>
           </a:prstGeom>
-          <a:noFill/>
-        </p:spPr>
-        <p:txBody>
-          <a:bodyPr wrap="none">
-            <a:spAutoFit/>
-          </a:bodyPr>
-          <a:lstStyle/>
-          <a:p>
-            <a:pPr>
-              <a:defRPr sz="2600" b="1">
-                <a:solidFill>
-                  <a:srgbClr val="F5F5F5"/>
-                </a:solidFill>
-              </a:defRPr>
-            </a:pPr>
-            <a:r>
-              <a:t>Core Conceptual Thesis</a:t>
-            </a:r>
-          </a:p>
-        </p:txBody>
-      </p:sp>
-      <p:sp>
-        <p:nvSpPr>
-          <p:cNvPr id="5" name="TextBox 4"/>
-          <p:cNvSpPr txBox="1"/>
-          <p:nvPr/>
-        </p:nvSpPr>
-        <p:spPr>
-          <a:xfrm>
-            <a:off x="731520" y="6400800"/>
-            <a:ext cx="10728655" cy="320040"/>
-          </a:xfrm>
-          <a:prstGeom prst="rect">
-            <a:avLst/>
-          </a:prstGeom>
-          <a:noFill/>
-        </p:spPr>
-        <p:txBody>
-          <a:bodyPr wrap="none">
-            <a:spAutoFit/>
-          </a:bodyPr>
-          <a:lstStyle/>
-          <a:p>
-            <a:pPr>
-              <a:defRPr sz="900">
-                <a:solidFill>
-                  <a:srgbClr val="9CA3AF"/>
-                </a:solidFill>
-              </a:defRPr>
-            </a:pPr>
-            <a:r>
-              <a:t>STI West Negros University  •  Jhon Paulo V. Gascon  •  Slide 3 of 11</a:t>
-            </a:r>
-          </a:p>
-        </p:txBody>
-      </p:sp>
-      <p:sp>
-        <p:nvSpPr>
-          <p:cNvPr id="6" name="Rounded Rectangle 5"/>
+        </p:spPr>
+      </p:pic>
+      <p:sp>
+        <p:nvSpPr>
+          <p:cNvPr id="5" name="!!Card_1"/>
           <p:cNvSpPr/>
           <p:nvPr/>
         </p:nvSpPr>
         <p:spPr>
           <a:xfrm>
-            <a:off x="731520" y="1828800"/>
-            <a:ext cx="10728655" cy="4114800"/>
+            <a:off x="6126480" y="1645920"/>
+            <a:ext cx="5303520" cy="1280160"/>
           </a:xfrm>
           <a:prstGeom prst="roundRect">
             <a:avLst/>
           </a:prstGeom>
           <a:solidFill>
-            <a:srgbClr val="1B2026"/>
+            <a:srgbClr val="1C2026"/>
           </a:solidFill>
-          <a:ln w="25400">
+          <a:ln w="12700">
             <a:solidFill>
-              <a:srgbClr val="8A94A6"/>
+              <a:srgbClr val="D97706"/>
             </a:solidFill>
           </a:ln>
         </p:spPr>
@@ -5974,6 +4999,232 @@
           </a:fontRef>
         </p:style>
         <p:txBody>
+          <a:bodyPr rtlCol="0" anchor="ctr" wrap="square"/>
+          <a:lstStyle/>
+          <a:p>
+            <a:pPr algn="ctr">
+              <a:defRPr b="1" sz="1300">
+                <a:solidFill>
+                  <a:srgbClr val="FFFFFF"/>
+                </a:solidFill>
+              </a:defRPr>
+            </a:pPr>
+            <a:r>
+              <a:t>Every Contact Leaves a Trace</a:t>
+            </a:r>
+          </a:p>
+          <a:p>
+            <a:pPr>
+              <a:defRPr sz="1050">
+                <a:solidFill>
+                  <a:srgbClr val="F0F0F0"/>
+                </a:solidFill>
+              </a:defRPr>
+            </a:pPr>
+            <a:r>
+              <a:t>Pioneered by Dr. Edmond Locard: physical contact between two surfaces results in cross-transfer of physical evidence.</a:t>
+            </a:r>
+          </a:p>
+        </p:txBody>
+      </p:sp>
+      <p:sp>
+        <p:nvSpPr>
+          <p:cNvPr id="6" name="!!Card_2"/>
+          <p:cNvSpPr/>
+          <p:nvPr/>
+        </p:nvSpPr>
+        <p:spPr>
+          <a:xfrm>
+            <a:off x="6126480" y="3108960"/>
+            <a:ext cx="5303520" cy="1280160"/>
+          </a:xfrm>
+          <a:prstGeom prst="roundRect">
+            <a:avLst/>
+          </a:prstGeom>
+          <a:solidFill>
+            <a:srgbClr val="1C2026"/>
+          </a:solidFill>
+          <a:ln w="12700">
+            <a:solidFill>
+              <a:srgbClr val="D97706"/>
+            </a:solidFill>
+          </a:ln>
+        </p:spPr>
+        <p:style>
+          <a:lnRef idx="1">
+            <a:schemeClr val="accent1"/>
+          </a:lnRef>
+          <a:fillRef idx="3">
+            <a:schemeClr val="accent1"/>
+          </a:fillRef>
+          <a:effectRef idx="2">
+            <a:schemeClr val="accent1"/>
+          </a:effectRef>
+          <a:fontRef idx="minor">
+            <a:schemeClr val="lt1"/>
+          </a:fontRef>
+        </p:style>
+        <p:txBody>
+          <a:bodyPr rtlCol="0" anchor="ctr" wrap="square"/>
+          <a:lstStyle/>
+          <a:p>
+            <a:pPr algn="ctr">
+              <a:defRPr b="1" sz="1300">
+                <a:solidFill>
+                  <a:srgbClr val="FFFFFF"/>
+                </a:solidFill>
+              </a:defRPr>
+            </a:pPr>
+            <a:r>
+              <a:t>Mutual Material Transfer</a:t>
+            </a:r>
+          </a:p>
+          <a:p>
+            <a:pPr>
+              <a:defRPr sz="1050">
+                <a:solidFill>
+                  <a:srgbClr val="F0F0F0"/>
+                </a:solidFill>
+              </a:defRPr>
+            </a:pPr>
+            <a:r>
+              <a:t>The perpetrator leaves traces (fibers, DNA, toolmarks) while carrying away elements of the scene.</a:t>
+            </a:r>
+          </a:p>
+        </p:txBody>
+      </p:sp>
+      <p:sp>
+        <p:nvSpPr>
+          <p:cNvPr id="7" name="!!Card_3"/>
+          <p:cNvSpPr/>
+          <p:nvPr/>
+        </p:nvSpPr>
+        <p:spPr>
+          <a:xfrm>
+            <a:off x="6126480" y="4572000"/>
+            <a:ext cx="5303520" cy="1280160"/>
+          </a:xfrm>
+          <a:prstGeom prst="roundRect">
+            <a:avLst/>
+          </a:prstGeom>
+          <a:solidFill>
+            <a:srgbClr val="1C2026"/>
+          </a:solidFill>
+          <a:ln w="12700">
+            <a:solidFill>
+              <a:srgbClr val="D97706"/>
+            </a:solidFill>
+          </a:ln>
+        </p:spPr>
+        <p:style>
+          <a:lnRef idx="1">
+            <a:schemeClr val="accent1"/>
+          </a:lnRef>
+          <a:fillRef idx="3">
+            <a:schemeClr val="accent1"/>
+          </a:fillRef>
+          <a:effectRef idx="2">
+            <a:schemeClr val="accent1"/>
+          </a:effectRef>
+          <a:fontRef idx="minor">
+            <a:schemeClr val="lt1"/>
+          </a:fontRef>
+        </p:style>
+        <p:txBody>
+          <a:bodyPr rtlCol="0" anchor="ctr" wrap="square"/>
+          <a:lstStyle/>
+          <a:p>
+            <a:pPr algn="ctr">
+              <a:defRPr b="1" sz="1300">
+                <a:solidFill>
+                  <a:srgbClr val="FFFFFF"/>
+                </a:solidFill>
+              </a:defRPr>
+            </a:pPr>
+            <a:r>
+              <a:t>Scientific Infallibility</a:t>
+            </a:r>
+          </a:p>
+          <a:p>
+            <a:pPr>
+              <a:defRPr sz="1050">
+                <a:solidFill>
+                  <a:srgbClr val="F0F0F0"/>
+                </a:solidFill>
+              </a:defRPr>
+            </a:pPr>
+            <a:r>
+              <a:t>Physical evidence cannot commit perjury; it can only be misunderstood, contaminated, or improperly handled.</a:t>
+            </a:r>
+          </a:p>
+        </p:txBody>
+      </p:sp>
+    </p:spTree>
+  </p:cSld>
+  <p:clrMapOvr>
+    <a:masterClrMapping/>
+  </p:clrMapOvr>
+  <mc:AlternateContent xmlns:mc="http://schemas.openxmlformats.org/markup-compatibility/2006">
+    <mc:Choice xmlns:p159="http://schemas.microsoft.com/office/powerpoint/2015/09/main" Requires="p159">
+      <p:transition spd="slow" p14:dur="1500">
+        <p159:morph option="byObject"/>
+      </p:transition>
+    </mc:Choice>
+    <mc:Fallback>
+      <p:transition spd="slow">
+        <p:fade/>
+      </p:transition>
+    </mc:Fallback>
+  </mc:AlternateContent>
+</p:sld>
+</file>
+
+<file path=ppt/slides/slide3.xml><?xml version="1.0" encoding="utf-8"?>
+<p:sld xmlns:p14="http://schemas.microsoft.com/office/powerpoint/2010/main" xmlns:a="http://schemas.openxmlformats.org/drawingml/2006/main" xmlns:p="http://schemas.openxmlformats.org/presentationml/2006/main" xmlns:r="http://schemas.openxmlformats.org/officeDocument/2006/relationships">
+  <p:cSld>
+    <p:spTree>
+      <p:nvGrpSpPr>
+        <p:cNvPr id="1" name=""/>
+        <p:cNvGrpSpPr/>
+        <p:nvPr/>
+      </p:nvGrpSpPr>
+      <p:grpSpPr/>
+      <p:sp>
+        <p:nvSpPr>
+          <p:cNvPr id="2" name="Rectangle 1"/>
+          <p:cNvSpPr/>
+          <p:nvPr/>
+        </p:nvSpPr>
+        <p:spPr>
+          <a:xfrm>
+            <a:off x="0" y="0"/>
+            <a:ext cx="12191695" cy="6858000"/>
+          </a:xfrm>
+          <a:prstGeom prst="rect">
+            <a:avLst/>
+          </a:prstGeom>
+          <a:solidFill>
+            <a:srgbClr val="111418"/>
+          </a:solidFill>
+          <a:ln>
+            <a:noFill/>
+          </a:ln>
+        </p:spPr>
+        <p:style>
+          <a:lnRef idx="1">
+            <a:schemeClr val="accent1"/>
+          </a:lnRef>
+          <a:fillRef idx="3">
+            <a:schemeClr val="accent1"/>
+          </a:fillRef>
+          <a:effectRef idx="2">
+            <a:schemeClr val="accent1"/>
+          </a:effectRef>
+          <a:fontRef idx="minor">
+            <a:schemeClr val="lt1"/>
+          </a:fontRef>
+        </p:style>
+        <p:txBody>
           <a:bodyPr rtlCol="0" anchor="ctr"/>
           <a:lstStyle/>
           <a:p>
@@ -5981,16 +5232,40 @@
           </a:p>
         </p:txBody>
       </p:sp>
-      <p:sp>
-        <p:nvSpPr>
-          <p:cNvPr id="7" name="TextBox 6"/>
+      <p:pic>
+        <p:nvPicPr>
+          <p:cNvPr id="3" name="!!Hero_Image" descr="csi_cordon.png"/>
+          <p:cNvPicPr>
+            <a:picLocks noChangeAspect="1"/>
+          </p:cNvPicPr>
+          <p:nvPr/>
+        </p:nvPicPr>
+        <p:blipFill>
+          <a:blip r:embed="rId2"/>
+          <a:stretch>
+            <a:fillRect/>
+          </a:stretch>
+        </p:blipFill>
+        <p:spPr>
+          <a:xfrm>
+            <a:off x="731520" y="914400"/>
+            <a:ext cx="5029200" cy="5029200"/>
+          </a:xfrm>
+          <a:prstGeom prst="rect">
+            <a:avLst/>
+          </a:prstGeom>
+        </p:spPr>
+      </p:pic>
+      <p:sp>
+        <p:nvSpPr>
+          <p:cNvPr id="4" name="!!Title_Card"/>
           <p:cNvSpPr txBox="1"/>
           <p:nvPr/>
         </p:nvSpPr>
         <p:spPr>
           <a:xfrm>
-            <a:off x="1371600" y="2743200"/>
-            <a:ext cx="9448495" cy="2286000"/>
+            <a:off x="6217920" y="2011680"/>
+            <a:ext cx="5303520" cy="3200400"/>
           </a:xfrm>
           <a:prstGeom prst="rect">
             <a:avLst/>
@@ -6003,15 +5278,27 @@
           </a:bodyPr>
           <a:lstStyle/>
           <a:p>
-            <a:pPr algn="ctr">
-              <a:defRPr sz="3400" b="1">
-                <a:solidFill>
-                  <a:srgbClr val="C8102E"/>
+            <a:pPr>
+              <a:defRPr sz="3200" b="1">
+                <a:solidFill>
+                  <a:srgbClr val="FFFFFF"/>
                 </a:solidFill>
               </a:defRPr>
             </a:pPr>
             <a:r>
-              <a:t>"Never touch, move, or alter anything until it has been properly documented, photographed, and measured."</a:t>
+              <a:t>Securing the Scene &amp; Perimeter</a:t>
+            </a:r>
+          </a:p>
+          <a:p>
+            <a:pPr>
+              <a:defRPr sz="1600">
+                <a:solidFill>
+                  <a:srgbClr val="D97706"/>
+                </a:solidFill>
+              </a:defRPr>
+            </a:pPr>
+            <a:r>
+              <a:t>Primary &amp; Secondary Barrier Protocols to Prevent Contamination</a:t>
             </a:r>
           </a:p>
         </p:txBody>
@@ -6028,7 +5315,7 @@
 </file>
 
 <file path=ppt/slides/slide4.xml><?xml version="1.0" encoding="utf-8"?>
-<p:sld xmlns:a="http://schemas.openxmlformats.org/drawingml/2006/main" xmlns:p="http://schemas.openxmlformats.org/presentationml/2006/main" xmlns:r="http://schemas.openxmlformats.org/officeDocument/2006/relationships">
+<p:sld xmlns:p14="http://schemas.microsoft.com/office/powerpoint/2010/main" xmlns:a="http://schemas.openxmlformats.org/drawingml/2006/main" xmlns:p="http://schemas.openxmlformats.org/presentationml/2006/main" xmlns:r="http://schemas.openxmlformats.org/officeDocument/2006/relationships">
   <p:cSld>
     <p:spTree>
       <p:nvGrpSpPr>
@@ -6088,8 +5375,8 @@
         </p:nvSpPr>
         <p:spPr>
           <a:xfrm>
-            <a:off x="731520" y="6400800"/>
-            <a:ext cx="10728655" cy="320040"/>
+            <a:off x="731520" y="457200"/>
+            <a:ext cx="10698480" cy="1005840"/>
           </a:xfrm>
           <a:prstGeom prst="rect">
             <a:avLst/>
@@ -6097,43 +5384,81 @@
           <a:noFill/>
         </p:spPr>
         <p:txBody>
-          <a:bodyPr wrap="none">
+          <a:bodyPr wrap="square">
             <a:spAutoFit/>
           </a:bodyPr>
           <a:lstStyle/>
           <a:p>
             <a:pPr>
-              <a:defRPr sz="900">
-                <a:solidFill>
-                  <a:srgbClr val="9CA3AF"/>
+              <a:defRPr sz="1100" b="1">
+                <a:solidFill>
+                  <a:srgbClr val="D97706"/>
                 </a:solidFill>
               </a:defRPr>
             </a:pPr>
             <a:r>
-              <a:t>STI West Negros University  •  Jhon Paulo V. Gascon  •  Slide 4 of 11</a:t>
-            </a:r>
-          </a:p>
-        </p:txBody>
-      </p:sp>
-      <p:sp>
-        <p:nvSpPr>
-          <p:cNvPr id="4" name="Rectangle 3"/>
-          <p:cNvSpPr/>
+              <a:t>PROCEDURAL STANDARDS</a:t>
+            </a:r>
+          </a:p>
+          <a:p>
+            <a:pPr>
+              <a:defRPr sz="2400" b="1">
+                <a:solidFill>
+                  <a:srgbClr val="FFFFFF"/>
+                </a:solidFill>
+              </a:defRPr>
+            </a:pPr>
+            <a:r>
+              <a:t>Forensic Scene Documentation</a:t>
+            </a:r>
+          </a:p>
+        </p:txBody>
+      </p:sp>
+      <p:pic>
+        <p:nvPicPr>
+          <p:cNvPr id="4" name="!!Content_Image" descr="csi_documentation.png"/>
+          <p:cNvPicPr>
+            <a:picLocks noChangeAspect="1"/>
+          </p:cNvPicPr>
           <p:nvPr/>
-        </p:nvSpPr>
-        <p:spPr>
-          <a:xfrm>
-            <a:off x="731520" y="2286000"/>
-            <a:ext cx="457200" cy="2560320"/>
+        </p:nvPicPr>
+        <p:blipFill>
+          <a:blip r:embed="rId2"/>
+          <a:stretch>
+            <a:fillRect/>
+          </a:stretch>
+        </p:blipFill>
+        <p:spPr>
+          <a:xfrm>
+            <a:off x="731520" y="1645920"/>
+            <a:ext cx="5029200" cy="4389120"/>
           </a:xfrm>
           <a:prstGeom prst="rect">
             <a:avLst/>
           </a:prstGeom>
+        </p:spPr>
+      </p:pic>
+      <p:sp>
+        <p:nvSpPr>
+          <p:cNvPr id="5" name="!!Card_1"/>
+          <p:cNvSpPr/>
+          <p:nvPr/>
+        </p:nvSpPr>
+        <p:spPr>
+          <a:xfrm>
+            <a:off x="6126480" y="1645920"/>
+            <a:ext cx="5303520" cy="1280160"/>
+          </a:xfrm>
+          <a:prstGeom prst="roundRect">
+            <a:avLst/>
+          </a:prstGeom>
           <a:solidFill>
-            <a:srgbClr val="C8102E"/>
+            <a:srgbClr val="1C2026"/>
           </a:solidFill>
-          <a:ln>
-            <a:noFill/>
+          <a:ln w="12700">
+            <a:solidFill>
+              <a:srgbClr val="D97706"/>
+            </a:solidFill>
           </a:ln>
         </p:spPr>
         <p:style>
@@ -6151,79 +5476,162 @@
           </a:fontRef>
         </p:style>
         <p:txBody>
-          <a:bodyPr rtlCol="0" anchor="ctr"/>
-          <a:lstStyle/>
-          <a:p>
-            <a:pPr algn="ctr"/>
-          </a:p>
-        </p:txBody>
-      </p:sp>
-      <p:sp>
-        <p:nvSpPr>
-          <p:cNvPr id="5" name="TextBox 4"/>
-          <p:cNvSpPr txBox="1"/>
+          <a:bodyPr rtlCol="0" anchor="ctr" wrap="square"/>
+          <a:lstStyle/>
+          <a:p>
+            <a:pPr algn="ctr">
+              <a:defRPr b="1" sz="1300">
+                <a:solidFill>
+                  <a:srgbClr val="FFFFFF"/>
+                </a:solidFill>
+              </a:defRPr>
+            </a:pPr>
+            <a:r>
+              <a:t>Panoramic to Macro Photography</a:t>
+            </a:r>
+          </a:p>
+          <a:p>
+            <a:pPr>
+              <a:defRPr sz="1050">
+                <a:solidFill>
+                  <a:srgbClr val="F0F0F0"/>
+                </a:solidFill>
+              </a:defRPr>
+            </a:pPr>
+            <a:r>
+              <a:t>Capture overall establishing shots, mid-range contextual photos, and close-up views with metric scale rulers.</a:t>
+            </a:r>
+          </a:p>
+        </p:txBody>
+      </p:sp>
+      <p:sp>
+        <p:nvSpPr>
+          <p:cNvPr id="6" name="!!Card_2"/>
+          <p:cNvSpPr/>
           <p:nvPr/>
         </p:nvSpPr>
         <p:spPr>
           <a:xfrm>
-            <a:off x="1463040" y="2194560"/>
-            <a:ext cx="9601200" cy="1371600"/>
-          </a:xfrm>
-          <a:prstGeom prst="rect">
+            <a:off x="6126480" y="3108960"/>
+            <a:ext cx="5303520" cy="1280160"/>
+          </a:xfrm>
+          <a:prstGeom prst="roundRect">
             <a:avLst/>
           </a:prstGeom>
-          <a:noFill/>
-        </p:spPr>
-        <p:txBody>
-          <a:bodyPr wrap="none">
-            <a:spAutoFit/>
-          </a:bodyPr>
-          <a:lstStyle/>
+          <a:solidFill>
+            <a:srgbClr val="1C2026"/>
+          </a:solidFill>
+          <a:ln w="12700">
+            <a:solidFill>
+              <a:srgbClr val="D97706"/>
+            </a:solidFill>
+          </a:ln>
+        </p:spPr>
+        <p:style>
+          <a:lnRef idx="1">
+            <a:schemeClr val="accent1"/>
+          </a:lnRef>
+          <a:fillRef idx="3">
+            <a:schemeClr val="accent1"/>
+          </a:fillRef>
+          <a:effectRef idx="2">
+            <a:schemeClr val="accent1"/>
+          </a:effectRef>
+          <a:fontRef idx="minor">
+            <a:schemeClr val="lt1"/>
+          </a:fontRef>
+        </p:style>
+        <p:txBody>
+          <a:bodyPr rtlCol="0" anchor="ctr" wrap="square"/>
+          <a:lstStyle/>
+          <a:p>
+            <a:pPr algn="ctr">
+              <a:defRPr b="1" sz="1300">
+                <a:solidFill>
+                  <a:srgbClr val="FFFFFF"/>
+                </a:solidFill>
+              </a:defRPr>
+            </a:pPr>
+            <a:r>
+              <a:t>Rough &amp; Final Sketches</a:t>
+            </a:r>
+          </a:p>
           <a:p>
             <a:pPr>
-              <a:defRPr sz="3800" b="1">
-                <a:solidFill>
-                  <a:srgbClr val="F5F5F5"/>
+              <a:defRPr sz="1050">
+                <a:solidFill>
+                  <a:srgbClr val="F0F0F0"/>
                 </a:solidFill>
               </a:defRPr>
             </a:pPr>
             <a:r>
-              <a:t>Part I: First Responder Responsibilities</a:t>
-            </a:r>
-          </a:p>
-        </p:txBody>
-      </p:sp>
-      <p:sp>
-        <p:nvSpPr>
-          <p:cNvPr id="6" name="TextBox 5"/>
-          <p:cNvSpPr txBox="1"/>
+              <a:t>Triangulation and baseline coordinate measurements linking key evidence to permanent architectural fixtures.</a:t>
+            </a:r>
+          </a:p>
+        </p:txBody>
+      </p:sp>
+      <p:sp>
+        <p:nvSpPr>
+          <p:cNvPr id="7" name="!!Card_3"/>
+          <p:cNvSpPr/>
           <p:nvPr/>
         </p:nvSpPr>
         <p:spPr>
           <a:xfrm>
-            <a:off x="1463040" y="3657600"/>
-            <a:ext cx="9601200" cy="1371600"/>
-          </a:xfrm>
-          <a:prstGeom prst="rect">
+            <a:off x="6126480" y="4572000"/>
+            <a:ext cx="5303520" cy="1280160"/>
+          </a:xfrm>
+          <a:prstGeom prst="roundRect">
             <a:avLst/>
           </a:prstGeom>
-          <a:noFill/>
-        </p:spPr>
-        <p:txBody>
-          <a:bodyPr wrap="none">
-            <a:spAutoFit/>
-          </a:bodyPr>
-          <a:lstStyle/>
+          <a:solidFill>
+            <a:srgbClr val="1C2026"/>
+          </a:solidFill>
+          <a:ln w="12700">
+            <a:solidFill>
+              <a:srgbClr val="D97706"/>
+            </a:solidFill>
+          </a:ln>
+        </p:spPr>
+        <p:style>
+          <a:lnRef idx="1">
+            <a:schemeClr val="accent1"/>
+          </a:lnRef>
+          <a:fillRef idx="3">
+            <a:schemeClr val="accent1"/>
+          </a:fillRef>
+          <a:effectRef idx="2">
+            <a:schemeClr val="accent1"/>
+          </a:effectRef>
+          <a:fontRef idx="minor">
+            <a:schemeClr val="lt1"/>
+          </a:fontRef>
+        </p:style>
+        <p:txBody>
+          <a:bodyPr rtlCol="0" anchor="ctr" wrap="square"/>
+          <a:lstStyle/>
+          <a:p>
+            <a:pPr algn="ctr">
+              <a:defRPr b="1" sz="1300">
+                <a:solidFill>
+                  <a:srgbClr val="FFFFFF"/>
+                </a:solidFill>
+              </a:defRPr>
+            </a:pPr>
+            <a:r>
+              <a:t>Audio &amp; Written Logs</a:t>
+            </a:r>
+          </a:p>
           <a:p>
             <a:pPr>
-              <a:defRPr sz="2200">
-                <a:solidFill>
-                  <a:srgbClr val="9CA3AF"/>
+              <a:defRPr sz="1050">
+                <a:solidFill>
+                  <a:srgbClr val="F0F0F0"/>
                 </a:solidFill>
               </a:defRPr>
             </a:pPr>
             <a:r>
-              <a:t>Immediate operational priorities upon arriving at the scene.</a:t>
+              <a:t>Detailed contemporaneous notes documenting time of entry, atmospheric conditions, and initial witness observations.</a:t>
             </a:r>
           </a:p>
         </p:txBody>
@@ -6233,14 +5641,23 @@
   <p:clrMapOvr>
     <a:masterClrMapping/>
   </p:clrMapOvr>
-  <p:transition spd="med">
-    <p:push dir="u"/>
-  </p:transition>
+  <mc:AlternateContent xmlns:mc="http://schemas.openxmlformats.org/markup-compatibility/2006">
+    <mc:Choice xmlns:p159="http://schemas.microsoft.com/office/powerpoint/2015/09/main" Requires="p159">
+      <p:transition spd="slow" p14:dur="1500">
+        <p159:morph option="byObject"/>
+      </p:transition>
+    </mc:Choice>
+    <mc:Fallback>
+      <p:transition spd="slow">
+        <p:fade/>
+      </p:transition>
+    </mc:Fallback>
+  </mc:AlternateContent>
 </p:sld>
 </file>
 
 <file path=ppt/slides/slide5.xml><?xml version="1.0" encoding="utf-8"?>
-<p:sld xmlns:a="http://schemas.openxmlformats.org/drawingml/2006/main" xmlns:p="http://schemas.openxmlformats.org/presentationml/2006/main" xmlns:r="http://schemas.openxmlformats.org/officeDocument/2006/relationships">
+<p:sld xmlns:p14="http://schemas.microsoft.com/office/powerpoint/2010/main" xmlns:a="http://schemas.openxmlformats.org/drawingml/2006/main" xmlns:p="http://schemas.openxmlformats.org/presentationml/2006/main" xmlns:r="http://schemas.openxmlformats.org/officeDocument/2006/relationships">
   <p:cSld>
     <p:spTree>
       <p:nvGrpSpPr>
@@ -6300,8 +5717,8 @@
         </p:nvSpPr>
         <p:spPr>
           <a:xfrm>
-            <a:off x="731520" y="365760"/>
-            <a:ext cx="10058400" cy="365760"/>
+            <a:off x="731520" y="457200"/>
+            <a:ext cx="10698480" cy="1005840"/>
           </a:xfrm>
           <a:prstGeom prst="rect">
             <a:avLst/>
@@ -6309,7 +5726,7 @@
           <a:noFill/>
         </p:spPr>
         <p:txBody>
-          <a:bodyPr wrap="none">
+          <a:bodyPr wrap="square">
             <a:spAutoFit/>
           </a:bodyPr>
           <a:lstStyle/>
@@ -6317,106 +5734,48 @@
             <a:pPr>
               <a:defRPr sz="1100" b="1">
                 <a:solidFill>
-                  <a:srgbClr val="C8102E"/>
+                  <a:srgbClr val="D97706"/>
                 </a:solidFill>
               </a:defRPr>
             </a:pPr>
             <a:r>
-              <a:t>EMPIRICAL EVIDENCE &amp; TRENDS</a:t>
-            </a:r>
-          </a:p>
-        </p:txBody>
-      </p:sp>
-      <p:sp>
-        <p:nvSpPr>
-          <p:cNvPr id="4" name="TextBox 3"/>
-          <p:cNvSpPr txBox="1"/>
-          <p:nvPr/>
-        </p:nvSpPr>
-        <p:spPr>
-          <a:xfrm>
-            <a:off x="731520" y="685800"/>
-            <a:ext cx="10515600" cy="731520"/>
-          </a:xfrm>
-          <a:prstGeom prst="rect">
-            <a:avLst/>
-          </a:prstGeom>
-          <a:noFill/>
-        </p:spPr>
-        <p:txBody>
-          <a:bodyPr wrap="none">
-            <a:spAutoFit/>
-          </a:bodyPr>
-          <a:lstStyle/>
+              <a:t>SEARCH METHODOLOGY</a:t>
+            </a:r>
+          </a:p>
           <a:p>
             <a:pPr>
-              <a:defRPr sz="2600" b="1">
-                <a:solidFill>
-                  <a:srgbClr val="F5F5F5"/>
+              <a:defRPr sz="2400" b="1">
+                <a:solidFill>
+                  <a:srgbClr val="FFFFFF"/>
                 </a:solidFill>
               </a:defRPr>
             </a:pPr>
             <a:r>
-              <a:t>Forensic Realities in Criminal Prosecution</a:t>
-            </a:r>
-          </a:p>
-        </p:txBody>
-      </p:sp>
-      <p:sp>
-        <p:nvSpPr>
-          <p:cNvPr id="5" name="TextBox 4"/>
-          <p:cNvSpPr txBox="1"/>
-          <p:nvPr/>
-        </p:nvSpPr>
-        <p:spPr>
-          <a:xfrm>
-            <a:off x="731520" y="6400800"/>
-            <a:ext cx="10728655" cy="320040"/>
-          </a:xfrm>
-          <a:prstGeom prst="rect">
-            <a:avLst/>
-          </a:prstGeom>
-          <a:noFill/>
-        </p:spPr>
-        <p:txBody>
-          <a:bodyPr wrap="none">
-            <a:spAutoFit/>
-          </a:bodyPr>
-          <a:lstStyle/>
-          <a:p>
-            <a:pPr>
-              <a:defRPr sz="900">
-                <a:solidFill>
-                  <a:srgbClr val="9CA3AF"/>
-                </a:solidFill>
-              </a:defRPr>
-            </a:pPr>
-            <a:r>
-              <a:t>STI West Negros University  •  Jhon Paulo V. Gascon  •  Slide 5 of 11</a:t>
-            </a:r>
-          </a:p>
-        </p:txBody>
-      </p:sp>
-      <p:sp>
-        <p:nvSpPr>
-          <p:cNvPr id="6" name="Rounded Rectangle 5"/>
+              <a:t>Four Standard Search Patterns</a:t>
+            </a:r>
+          </a:p>
+        </p:txBody>
+      </p:sp>
+      <p:sp>
+        <p:nvSpPr>
+          <p:cNvPr id="4" name="!!Card_1"/>
           <p:cNvSpPr/>
           <p:nvPr/>
         </p:nvSpPr>
         <p:spPr>
           <a:xfrm>
-            <a:off x="731520" y="2011680"/>
-            <a:ext cx="3413455" cy="3840480"/>
+            <a:off x="731520" y="1645920"/>
+            <a:ext cx="3291840" cy="4114800"/>
           </a:xfrm>
           <a:prstGeom prst="roundRect">
             <a:avLst/>
           </a:prstGeom>
           <a:solidFill>
-            <a:srgbClr val="1B2026"/>
+            <a:srgbClr val="1C2026"/>
           </a:solidFill>
           <a:ln w="19050">
             <a:solidFill>
-              <a:srgbClr val="C8102E"/>
+              <a:srgbClr val="D97706"/>
             </a:solidFill>
           </a:ln>
         </p:spPr>
@@ -6435,83 +5794,54 @@
           </a:fontRef>
         </p:style>
         <p:txBody>
-          <a:bodyPr rtlCol="0" anchor="ctr"/>
-          <a:lstStyle/>
-          <a:p>
-            <a:pPr algn="ctr"/>
-          </a:p>
-        </p:txBody>
-      </p:sp>
-      <p:sp>
-        <p:nvSpPr>
-          <p:cNvPr id="7" name="TextBox 6"/>
-          <p:cNvSpPr txBox="1"/>
-          <p:nvPr/>
-        </p:nvSpPr>
-        <p:spPr>
-          <a:xfrm>
-            <a:off x="914400" y="2286000"/>
-            <a:ext cx="3047695" cy="3200400"/>
-          </a:xfrm>
-          <a:prstGeom prst="rect">
-            <a:avLst/>
-          </a:prstGeom>
-          <a:noFill/>
-        </p:spPr>
-        <p:txBody>
-          <a:bodyPr wrap="square">
-            <a:spAutoFit/>
-          </a:bodyPr>
-          <a:lstStyle/>
+          <a:bodyPr rtlCol="0" anchor="ctr" wrap="square"/>
+          <a:lstStyle/>
+          <a:p>
+            <a:pPr algn="ctr">
+              <a:defRPr b="1" sz="1500">
+                <a:solidFill>
+                  <a:srgbClr val="D97706"/>
+                </a:solidFill>
+              </a:defRPr>
+            </a:pPr>
+            <a:r>
+              <a:t>1. Strip / Line Search</a:t>
+            </a:r>
+          </a:p>
           <a:p>
             <a:pPr>
-              <a:defRPr sz="4800" b="1">
-                <a:solidFill>
-                  <a:srgbClr val="C8102E"/>
+              <a:defRPr sz="1100">
+                <a:solidFill>
+                  <a:srgbClr val="F0F0F0"/>
                 </a:solidFill>
               </a:defRPr>
             </a:pPr>
             <a:r>
-              <a:t>85%</a:t>
-            </a:r>
-          </a:p>
-          <a:p>
-            <a:pPr>
-              <a:spcBef>
-                <a:spcPts val="1600"/>
-              </a:spcBef>
-              <a:defRPr sz="1600">
-                <a:solidFill>
-                  <a:srgbClr val="F5F5F5"/>
-                </a:solidFill>
-              </a:defRPr>
-            </a:pPr>
-            <a:r>
-              <a:t>Homicide convictions dependent upon untainted physical evidence</a:t>
-            </a:r>
-          </a:p>
-        </p:txBody>
-      </p:sp>
-      <p:sp>
-        <p:nvSpPr>
-          <p:cNvPr id="8" name="Rounded Rectangle 7"/>
+              <a:t>Investigators walk parallel paths in a straight line; ideal for large open outdoor fields and expansive terrains.</a:t>
+            </a:r>
+          </a:p>
+        </p:txBody>
+      </p:sp>
+      <p:sp>
+        <p:nvSpPr>
+          <p:cNvPr id="5" name="!!Card_2"/>
           <p:cNvSpPr/>
           <p:nvPr/>
         </p:nvSpPr>
         <p:spPr>
           <a:xfrm>
-            <a:off x="4389120" y="2011680"/>
-            <a:ext cx="3413455" cy="3840480"/>
+            <a:off x="4389120" y="1645920"/>
+            <a:ext cx="3291840" cy="4114800"/>
           </a:xfrm>
           <a:prstGeom prst="roundRect">
             <a:avLst/>
           </a:prstGeom>
           <a:solidFill>
-            <a:srgbClr val="1B2026"/>
+            <a:srgbClr val="1C2026"/>
           </a:solidFill>
           <a:ln w="19050">
             <a:solidFill>
-              <a:srgbClr val="C8102E"/>
+              <a:srgbClr val="D97706"/>
             </a:solidFill>
           </a:ln>
         </p:spPr>
@@ -6530,83 +5860,54 @@
           </a:fontRef>
         </p:style>
         <p:txBody>
-          <a:bodyPr rtlCol="0" anchor="ctr"/>
-          <a:lstStyle/>
-          <a:p>
-            <a:pPr algn="ctr"/>
-          </a:p>
-        </p:txBody>
-      </p:sp>
-      <p:sp>
-        <p:nvSpPr>
-          <p:cNvPr id="9" name="TextBox 8"/>
-          <p:cNvSpPr txBox="1"/>
-          <p:nvPr/>
-        </p:nvSpPr>
-        <p:spPr>
-          <a:xfrm>
-            <a:off x="4572000" y="2286000"/>
-            <a:ext cx="3047695" cy="3200400"/>
-          </a:xfrm>
-          <a:prstGeom prst="rect">
-            <a:avLst/>
-          </a:prstGeom>
-          <a:noFill/>
-        </p:spPr>
-        <p:txBody>
-          <a:bodyPr wrap="square">
-            <a:spAutoFit/>
-          </a:bodyPr>
-          <a:lstStyle/>
+          <a:bodyPr rtlCol="0" anchor="ctr" wrap="square"/>
+          <a:lstStyle/>
+          <a:p>
+            <a:pPr algn="ctr">
+              <a:defRPr b="1" sz="1500">
+                <a:solidFill>
+                  <a:srgbClr val="D97706"/>
+                </a:solidFill>
+              </a:defRPr>
+            </a:pPr>
+            <a:r>
+              <a:t>2. Grid Search</a:t>
+            </a:r>
+          </a:p>
           <a:p>
             <a:pPr>
-              <a:defRPr sz="4800" b="1">
-                <a:solidFill>
-                  <a:srgbClr val="C8102E"/>
+              <a:defRPr sz="1100">
+                <a:solidFill>
+                  <a:srgbClr val="F0F0F0"/>
                 </a:solidFill>
               </a:defRPr>
             </a:pPr>
             <a:r>
-              <a:t>60%</a:t>
-            </a:r>
-          </a:p>
-          <a:p>
-            <a:pPr>
-              <a:spcBef>
-                <a:spcPts val="1600"/>
-              </a:spcBef>
-              <a:defRPr sz="1600">
-                <a:solidFill>
-                  <a:srgbClr val="F5F5F5"/>
-                </a:solidFill>
-              </a:defRPr>
-            </a:pPr>
-            <a:r>
-              <a:t>Acquittals caused by contaminated crime scenes or broken chain of custody</a:t>
-            </a:r>
-          </a:p>
-        </p:txBody>
-      </p:sp>
-      <p:sp>
-        <p:nvSpPr>
-          <p:cNvPr id="10" name="Rounded Rectangle 9"/>
+              <a:t>Two perpendicular strip searches offering thorough dual-coverage across complex indoor or vegetative areas.</a:t>
+            </a:r>
+          </a:p>
+        </p:txBody>
+      </p:sp>
+      <p:sp>
+        <p:nvSpPr>
+          <p:cNvPr id="6" name="!!Card_3"/>
           <p:cNvSpPr/>
           <p:nvPr/>
         </p:nvSpPr>
         <p:spPr>
           <a:xfrm>
-            <a:off x="8046720" y="2011680"/>
-            <a:ext cx="3413455" cy="3840480"/>
+            <a:off x="8046720" y="1645920"/>
+            <a:ext cx="3291840" cy="4114800"/>
           </a:xfrm>
           <a:prstGeom prst="roundRect">
             <a:avLst/>
           </a:prstGeom>
           <a:solidFill>
-            <a:srgbClr val="1B2026"/>
+            <a:srgbClr val="1C2026"/>
           </a:solidFill>
           <a:ln w="19050">
             <a:solidFill>
-              <a:srgbClr val="C8102E"/>
+              <a:srgbClr val="D97706"/>
             </a:solidFill>
           </a:ln>
         </p:spPr>
@@ -6625,59 +5926,30 @@
           </a:fontRef>
         </p:style>
         <p:txBody>
-          <a:bodyPr rtlCol="0" anchor="ctr"/>
-          <a:lstStyle/>
-          <a:p>
-            <a:pPr algn="ctr"/>
-          </a:p>
-        </p:txBody>
-      </p:sp>
-      <p:sp>
-        <p:nvSpPr>
-          <p:cNvPr id="11" name="TextBox 10"/>
-          <p:cNvSpPr txBox="1"/>
-          <p:nvPr/>
-        </p:nvSpPr>
-        <p:spPr>
-          <a:xfrm>
-            <a:off x="8229600" y="2286000"/>
-            <a:ext cx="3047695" cy="3200400"/>
-          </a:xfrm>
-          <a:prstGeom prst="rect">
-            <a:avLst/>
-          </a:prstGeom>
-          <a:noFill/>
-        </p:spPr>
-        <p:txBody>
-          <a:bodyPr wrap="square">
-            <a:spAutoFit/>
-          </a:bodyPr>
-          <a:lstStyle/>
+          <a:bodyPr rtlCol="0" anchor="ctr" wrap="square"/>
+          <a:lstStyle/>
+          <a:p>
+            <a:pPr algn="ctr">
+              <a:defRPr b="1" sz="1500">
+                <a:solidFill>
+                  <a:srgbClr val="D97706"/>
+                </a:solidFill>
+              </a:defRPr>
+            </a:pPr>
+            <a:r>
+              <a:t>3. Spiral Search (Inward/Outward)</a:t>
+            </a:r>
+          </a:p>
           <a:p>
             <a:pPr>
-              <a:defRPr sz="4800" b="1">
-                <a:solidFill>
-                  <a:srgbClr val="C8102E"/>
+              <a:defRPr sz="1100">
+                <a:solidFill>
+                  <a:srgbClr val="F0F0F0"/>
                 </a:solidFill>
               </a:defRPr>
             </a:pPr>
             <a:r>
-              <a:t>1st Hour</a:t>
-            </a:r>
-          </a:p>
-          <a:p>
-            <a:pPr>
-              <a:spcBef>
-                <a:spcPts val="1600"/>
-              </a:spcBef>
-              <a:defRPr sz="1600">
-                <a:solidFill>
-                  <a:srgbClr val="F5F5F5"/>
-                </a:solidFill>
-              </a:defRPr>
-            </a:pPr>
-            <a:r>
-              <a:t>The 'Golden Hour' where forensic evidence is most volatile and vulnerable</a:t>
+              <a:t>Path spirals toward or away from the central focus; effective in localized rooms with clear focal epicenters.</a:t>
             </a:r>
           </a:p>
         </p:txBody>
@@ -6694,7 +5966,7 @@
 </file>
 
 <file path=ppt/slides/slide6.xml><?xml version="1.0" encoding="utf-8"?>
-<p:sld xmlns:a="http://schemas.openxmlformats.org/drawingml/2006/main" xmlns:p="http://schemas.openxmlformats.org/presentationml/2006/main" xmlns:r="http://schemas.openxmlformats.org/officeDocument/2006/relationships">
+<p:sld xmlns:p14="http://schemas.microsoft.com/office/powerpoint/2010/main" xmlns:a="http://schemas.openxmlformats.org/drawingml/2006/main" xmlns:p="http://schemas.openxmlformats.org/presentationml/2006/main" xmlns:r="http://schemas.openxmlformats.org/officeDocument/2006/relationships">
   <p:cSld>
     <p:spTree>
       <p:nvGrpSpPr>
@@ -6754,8 +6026,8 @@
         </p:nvSpPr>
         <p:spPr>
           <a:xfrm>
-            <a:off x="731520" y="365760"/>
-            <a:ext cx="10058400" cy="365760"/>
+            <a:off x="731520" y="457200"/>
+            <a:ext cx="10698480" cy="1005840"/>
           </a:xfrm>
           <a:prstGeom prst="rect">
             <a:avLst/>
@@ -6763,7 +6035,7 @@
           <a:noFill/>
         </p:spPr>
         <p:txBody>
-          <a:bodyPr wrap="none">
+          <a:bodyPr wrap="square">
             <a:spAutoFit/>
           </a:bodyPr>
           <a:lstStyle/>
@@ -6771,106 +6043,72 @@
             <a:pPr>
               <a:defRPr sz="1100" b="1">
                 <a:solidFill>
-                  <a:srgbClr val="C8102E"/>
+                  <a:srgbClr val="D97706"/>
                 </a:solidFill>
               </a:defRPr>
             </a:pPr>
             <a:r>
-              <a:t>STRATEGIC FRAMEWORK</a:t>
-            </a:r>
-          </a:p>
-        </p:txBody>
-      </p:sp>
-      <p:sp>
-        <p:nvSpPr>
-          <p:cNvPr id="4" name="TextBox 3"/>
-          <p:cNvSpPr txBox="1"/>
+              <a:t>COLLECTION PROTOCOLS</a:t>
+            </a:r>
+          </a:p>
+          <a:p>
+            <a:pPr>
+              <a:defRPr sz="2400" b="1">
+                <a:solidFill>
+                  <a:srgbClr val="FFFFFF"/>
+                </a:solidFill>
+              </a:defRPr>
+            </a:pPr>
+            <a:r>
+              <a:t>Physical &amp; Biological Evidence</a:t>
+            </a:r>
+          </a:p>
+        </p:txBody>
+      </p:sp>
+      <p:pic>
+        <p:nvPicPr>
+          <p:cNvPr id="4" name="!!Content_Image" descr="csi_ballistics.png"/>
+          <p:cNvPicPr>
+            <a:picLocks noChangeAspect="1"/>
+          </p:cNvPicPr>
           <p:nvPr/>
-        </p:nvSpPr>
-        <p:spPr>
-          <a:xfrm>
-            <a:off x="731520" y="685800"/>
-            <a:ext cx="10515600" cy="731520"/>
+        </p:nvPicPr>
+        <p:blipFill>
+          <a:blip r:embed="rId2"/>
+          <a:stretch>
+            <a:fillRect/>
+          </a:stretch>
+        </p:blipFill>
+        <p:spPr>
+          <a:xfrm>
+            <a:off x="731520" y="1645920"/>
+            <a:ext cx="5029200" cy="4389120"/>
           </a:xfrm>
           <a:prstGeom prst="rect">
             <a:avLst/>
           </a:prstGeom>
-          <a:noFill/>
-        </p:spPr>
-        <p:txBody>
-          <a:bodyPr wrap="none">
-            <a:spAutoFit/>
-          </a:bodyPr>
-          <a:lstStyle/>
-          <a:p>
-            <a:pPr>
-              <a:defRPr sz="2600" b="1">
-                <a:solidFill>
-                  <a:srgbClr val="F5F5F5"/>
-                </a:solidFill>
-              </a:defRPr>
-            </a:pPr>
-            <a:r>
-              <a:t>Three Mandatory Stages of Scene Documentation</a:t>
-            </a:r>
-          </a:p>
-        </p:txBody>
-      </p:sp>
-      <p:sp>
-        <p:nvSpPr>
-          <p:cNvPr id="5" name="TextBox 4"/>
-          <p:cNvSpPr txBox="1"/>
-          <p:nvPr/>
-        </p:nvSpPr>
-        <p:spPr>
-          <a:xfrm>
-            <a:off x="731520" y="6400800"/>
-            <a:ext cx="10728655" cy="320040"/>
-          </a:xfrm>
-          <a:prstGeom prst="rect">
-            <a:avLst/>
-          </a:prstGeom>
-          <a:noFill/>
-        </p:spPr>
-        <p:txBody>
-          <a:bodyPr wrap="none">
-            <a:spAutoFit/>
-          </a:bodyPr>
-          <a:lstStyle/>
-          <a:p>
-            <a:pPr>
-              <a:defRPr sz="900">
-                <a:solidFill>
-                  <a:srgbClr val="9CA3AF"/>
-                </a:solidFill>
-              </a:defRPr>
-            </a:pPr>
-            <a:r>
-              <a:t>STI West Negros University  •  Jhon Paulo V. Gascon  •  Slide 6 of 11</a:t>
-            </a:r>
-          </a:p>
-        </p:txBody>
-      </p:sp>
-      <p:sp>
-        <p:nvSpPr>
-          <p:cNvPr id="6" name="Rounded Rectangle 5"/>
+        </p:spPr>
+      </p:pic>
+      <p:sp>
+        <p:nvSpPr>
+          <p:cNvPr id="5" name="!!Card_1"/>
           <p:cNvSpPr/>
           <p:nvPr/>
         </p:nvSpPr>
         <p:spPr>
           <a:xfrm>
-            <a:off x="731520" y="2011680"/>
-            <a:ext cx="3413455" cy="3840480"/>
+            <a:off x="6126480" y="1645920"/>
+            <a:ext cx="5303520" cy="1280160"/>
           </a:xfrm>
           <a:prstGeom prst="roundRect">
             <a:avLst/>
           </a:prstGeom>
           <a:solidFill>
-            <a:srgbClr val="1B2026"/>
+            <a:srgbClr val="1C2026"/>
           </a:solidFill>
-          <a:ln w="19050">
+          <a:ln w="12700">
             <a:solidFill>
-              <a:srgbClr val="8A94A6"/>
+              <a:srgbClr val="D97706"/>
             </a:solidFill>
           </a:ln>
         </p:spPr>
@@ -6889,83 +6127,54 @@
           </a:fontRef>
         </p:style>
         <p:txBody>
-          <a:bodyPr rtlCol="0" anchor="ctr"/>
-          <a:lstStyle/>
-          <a:p>
-            <a:pPr algn="ctr"/>
-          </a:p>
-        </p:txBody>
-      </p:sp>
-      <p:sp>
-        <p:nvSpPr>
-          <p:cNvPr id="7" name="TextBox 6"/>
-          <p:cNvSpPr txBox="1"/>
-          <p:nvPr/>
-        </p:nvSpPr>
-        <p:spPr>
-          <a:xfrm>
-            <a:off x="914400" y="2286000"/>
-            <a:ext cx="3047695" cy="3200400"/>
-          </a:xfrm>
-          <a:prstGeom prst="rect">
-            <a:avLst/>
-          </a:prstGeom>
-          <a:noFill/>
-        </p:spPr>
-        <p:txBody>
-          <a:bodyPr wrap="square">
-            <a:spAutoFit/>
-          </a:bodyPr>
-          <a:lstStyle/>
+          <a:bodyPr rtlCol="0" anchor="ctr" wrap="square"/>
+          <a:lstStyle/>
+          <a:p>
+            <a:pPr algn="ctr">
+              <a:defRPr b="1" sz="1300">
+                <a:solidFill>
+                  <a:srgbClr val="FFFFFF"/>
+                </a:solidFill>
+              </a:defRPr>
+            </a:pPr>
+            <a:r>
+              <a:t>Biological Fluids (Blood/DNA)</a:t>
+            </a:r>
+          </a:p>
           <a:p>
             <a:pPr>
-              <a:defRPr sz="2000" b="1">
-                <a:solidFill>
-                  <a:srgbClr val="C8102E"/>
+              <a:defRPr sz="1050">
+                <a:solidFill>
+                  <a:srgbClr val="F0F0F0"/>
                 </a:solidFill>
               </a:defRPr>
             </a:pPr>
             <a:r>
-              <a:t>Accurate Notes</a:t>
-            </a:r>
-          </a:p>
-          <a:p>
-            <a:pPr>
-              <a:spcBef>
-                <a:spcPts val="1400"/>
-              </a:spcBef>
-              <a:defRPr sz="1400">
-                <a:solidFill>
-                  <a:srgbClr val="F5F5F5"/>
-                </a:solidFill>
-              </a:defRPr>
-            </a:pPr>
-            <a:r>
-              <a:t>Detailed written chronological log of climate, lighting, odors, and arrival times.</a:t>
-            </a:r>
-          </a:p>
-        </p:txBody>
-      </p:sp>
-      <p:sp>
-        <p:nvSpPr>
-          <p:cNvPr id="8" name="Rounded Rectangle 7"/>
+              <a:t>Air-dried before packaging in breathable paper bags to prevent anaerobic fungal degradation.</a:t>
+            </a:r>
+          </a:p>
+        </p:txBody>
+      </p:sp>
+      <p:sp>
+        <p:nvSpPr>
+          <p:cNvPr id="6" name="!!Card_2"/>
           <p:cNvSpPr/>
           <p:nvPr/>
         </p:nvSpPr>
         <p:spPr>
           <a:xfrm>
-            <a:off x="4389120" y="2011680"/>
-            <a:ext cx="3413455" cy="3840480"/>
+            <a:off x="6126480" y="3108960"/>
+            <a:ext cx="5303520" cy="1280160"/>
           </a:xfrm>
           <a:prstGeom prst="roundRect">
             <a:avLst/>
           </a:prstGeom>
           <a:solidFill>
-            <a:srgbClr val="1B2026"/>
+            <a:srgbClr val="1C2026"/>
           </a:solidFill>
-          <a:ln w="19050">
+          <a:ln w="12700">
             <a:solidFill>
-              <a:srgbClr val="8A94A6"/>
+              <a:srgbClr val="D97706"/>
             </a:solidFill>
           </a:ln>
         </p:spPr>
@@ -6984,83 +6193,54 @@
           </a:fontRef>
         </p:style>
         <p:txBody>
-          <a:bodyPr rtlCol="0" anchor="ctr"/>
-          <a:lstStyle/>
-          <a:p>
-            <a:pPr algn="ctr"/>
-          </a:p>
-        </p:txBody>
-      </p:sp>
-      <p:sp>
-        <p:nvSpPr>
-          <p:cNvPr id="9" name="TextBox 8"/>
-          <p:cNvSpPr txBox="1"/>
-          <p:nvPr/>
-        </p:nvSpPr>
-        <p:spPr>
-          <a:xfrm>
-            <a:off x="4572000" y="2286000"/>
-            <a:ext cx="3047695" cy="3200400"/>
-          </a:xfrm>
-          <a:prstGeom prst="rect">
-            <a:avLst/>
-          </a:prstGeom>
-          <a:noFill/>
-        </p:spPr>
-        <p:txBody>
-          <a:bodyPr wrap="square">
-            <a:spAutoFit/>
-          </a:bodyPr>
-          <a:lstStyle/>
+          <a:bodyPr rtlCol="0" anchor="ctr" wrap="square"/>
+          <a:lstStyle/>
+          <a:p>
+            <a:pPr algn="ctr">
+              <a:defRPr b="1" sz="1300">
+                <a:solidFill>
+                  <a:srgbClr val="FFFFFF"/>
+                </a:solidFill>
+              </a:defRPr>
+            </a:pPr>
+            <a:r>
+              <a:t>Trace Evidence (Fibers/Paint)</a:t>
+            </a:r>
+          </a:p>
           <a:p>
             <a:pPr>
-              <a:defRPr sz="2000" b="1">
-                <a:solidFill>
-                  <a:srgbClr val="C8102E"/>
+              <a:defRPr sz="1050">
+                <a:solidFill>
+                  <a:srgbClr val="F0F0F0"/>
                 </a:solidFill>
               </a:defRPr>
             </a:pPr>
             <a:r>
-              <a:t>Forensic Photography</a:t>
-            </a:r>
-          </a:p>
-          <a:p>
-            <a:pPr>
-              <a:spcBef>
-                <a:spcPts val="1400"/>
-              </a:spcBef>
-              <a:defRPr sz="1400">
-                <a:solidFill>
-                  <a:srgbClr val="F5F5F5"/>
-                </a:solidFill>
-              </a:defRPr>
-            </a:pPr>
-            <a:r>
-              <a:t>Overall, medium-range, and close-up photographs taken with scale markers.</a:t>
-            </a:r>
-          </a:p>
-        </p:txBody>
-      </p:sp>
-      <p:sp>
-        <p:nvSpPr>
-          <p:cNvPr id="10" name="Rounded Rectangle 9"/>
+              <a:t>Sealed in druggist folds and rigid containers to prevent cross-contamination.</a:t>
+            </a:r>
+          </a:p>
+        </p:txBody>
+      </p:sp>
+      <p:sp>
+        <p:nvSpPr>
+          <p:cNvPr id="7" name="!!Card_3"/>
           <p:cNvSpPr/>
           <p:nvPr/>
         </p:nvSpPr>
         <p:spPr>
           <a:xfrm>
-            <a:off x="8046720" y="2011680"/>
-            <a:ext cx="3413455" cy="3840480"/>
+            <a:off x="6126480" y="4572000"/>
+            <a:ext cx="5303520" cy="1280160"/>
           </a:xfrm>
           <a:prstGeom prst="roundRect">
             <a:avLst/>
           </a:prstGeom>
           <a:solidFill>
-            <a:srgbClr val="1B2026"/>
+            <a:srgbClr val="1C2026"/>
           </a:solidFill>
-          <a:ln w="19050">
+          <a:ln w="12700">
             <a:solidFill>
-              <a:srgbClr val="8A94A6"/>
+              <a:srgbClr val="D97706"/>
             </a:solidFill>
           </a:ln>
         </p:spPr>
@@ -7079,59 +6259,30 @@
           </a:fontRef>
         </p:style>
         <p:txBody>
-          <a:bodyPr rtlCol="0" anchor="ctr"/>
-          <a:lstStyle/>
-          <a:p>
-            <a:pPr algn="ctr"/>
-          </a:p>
-        </p:txBody>
-      </p:sp>
-      <p:sp>
-        <p:nvSpPr>
-          <p:cNvPr id="11" name="TextBox 10"/>
-          <p:cNvSpPr txBox="1"/>
-          <p:nvPr/>
-        </p:nvSpPr>
-        <p:spPr>
-          <a:xfrm>
-            <a:off x="8229600" y="2286000"/>
-            <a:ext cx="3047695" cy="3200400"/>
-          </a:xfrm>
-          <a:prstGeom prst="rect">
-            <a:avLst/>
-          </a:prstGeom>
-          <a:noFill/>
-        </p:spPr>
-        <p:txBody>
-          <a:bodyPr wrap="square">
-            <a:spAutoFit/>
-          </a:bodyPr>
-          <a:lstStyle/>
+          <a:bodyPr rtlCol="0" anchor="ctr" wrap="square"/>
+          <a:lstStyle/>
+          <a:p>
+            <a:pPr algn="ctr">
+              <a:defRPr b="1" sz="1300">
+                <a:solidFill>
+                  <a:srgbClr val="FFFFFF"/>
+                </a:solidFill>
+              </a:defRPr>
+            </a:pPr>
+            <a:r>
+              <a:t>Ballistics &amp; Firearms</a:t>
+            </a:r>
+          </a:p>
           <a:p>
             <a:pPr>
-              <a:defRPr sz="2000" b="1">
-                <a:solidFill>
-                  <a:srgbClr val="C8102E"/>
+              <a:defRPr sz="1050">
+                <a:solidFill>
+                  <a:srgbClr val="F0F0F0"/>
                 </a:solidFill>
               </a:defRPr>
             </a:pPr>
             <a:r>
-              <a:t>Proportional Sketching</a:t>
-            </a:r>
-          </a:p>
-          <a:p>
-            <a:pPr>
-              <a:spcBef>
-                <a:spcPts val="1400"/>
-              </a:spcBef>
-              <a:defRPr sz="1400">
-                <a:solidFill>
-                  <a:srgbClr val="F5F5F5"/>
-                </a:solidFill>
-              </a:defRPr>
-            </a:pPr>
-            <a:r>
-              <a:t>Rough and finished sketches with triangulation measurements from fixed points.</a:t>
+              <a:t>Firearms unloaded with chamber cleared; bullets wrapped in cotton to protect rifling striations.</a:t>
             </a:r>
           </a:p>
         </p:txBody>
@@ -7148,7 +6299,7 @@
 </file>
 
 <file path=ppt/slides/slide7.xml><?xml version="1.0" encoding="utf-8"?>
-<p:sld xmlns:a="http://schemas.openxmlformats.org/drawingml/2006/main" xmlns:p="http://schemas.openxmlformats.org/presentationml/2006/main" xmlns:r="http://schemas.openxmlformats.org/officeDocument/2006/relationships">
+<p:sld xmlns:p14="http://schemas.microsoft.com/office/powerpoint/2010/main" xmlns:a="http://schemas.openxmlformats.org/drawingml/2006/main" xmlns:p="http://schemas.openxmlformats.org/presentationml/2006/main" xmlns:r="http://schemas.openxmlformats.org/officeDocument/2006/relationships">
   <p:cSld>
     <p:spTree>
       <p:nvGrpSpPr>
@@ -7200,16 +6351,40 @@
           </a:p>
         </p:txBody>
       </p:sp>
-      <p:sp>
-        <p:nvSpPr>
-          <p:cNvPr id="3" name="TextBox 2"/>
+      <p:pic>
+        <p:nvPicPr>
+          <p:cNvPr id="3" name="!!Hero_Image" descr="csi_chain.png"/>
+          <p:cNvPicPr>
+            <a:picLocks noChangeAspect="1"/>
+          </p:cNvPicPr>
+          <p:nvPr/>
+        </p:nvPicPr>
+        <p:blipFill>
+          <a:blip r:embed="rId2"/>
+          <a:stretch>
+            <a:fillRect/>
+          </a:stretch>
+        </p:blipFill>
+        <p:spPr>
+          <a:xfrm>
+            <a:off x="731520" y="914400"/>
+            <a:ext cx="5029200" cy="5029200"/>
+          </a:xfrm>
+          <a:prstGeom prst="rect">
+            <a:avLst/>
+          </a:prstGeom>
+        </p:spPr>
+      </p:pic>
+      <p:sp>
+        <p:nvSpPr>
+          <p:cNvPr id="4" name="!!Title_Card"/>
           <p:cNvSpPr txBox="1"/>
           <p:nvPr/>
         </p:nvSpPr>
         <p:spPr>
           <a:xfrm>
-            <a:off x="731520" y="365760"/>
-            <a:ext cx="10058400" cy="365760"/>
+            <a:off x="6217920" y="2011680"/>
+            <a:ext cx="5303520" cy="3200400"/>
           </a:xfrm>
           <a:prstGeom prst="rect">
             <a:avLst/>
@@ -7217,115 +6392,85 @@
           <a:noFill/>
         </p:spPr>
         <p:txBody>
-          <a:bodyPr wrap="none">
+          <a:bodyPr wrap="square">
             <a:spAutoFit/>
           </a:bodyPr>
           <a:lstStyle/>
           <a:p>
             <a:pPr>
-              <a:defRPr sz="1100" b="1">
-                <a:solidFill>
-                  <a:srgbClr val="C8102E"/>
+              <a:defRPr sz="3200" b="1">
+                <a:solidFill>
+                  <a:srgbClr val="FFFFFF"/>
                 </a:solidFill>
               </a:defRPr>
             </a:pPr>
             <a:r>
-              <a:t>COMPARATIVE ANALYSIS</a:t>
-            </a:r>
-          </a:p>
-        </p:txBody>
-      </p:sp>
-      <p:sp>
-        <p:nvSpPr>
-          <p:cNvPr id="4" name="TextBox 3"/>
-          <p:cNvSpPr txBox="1"/>
+              <a:t>Strict Chain of Custody</a:t>
+            </a:r>
+          </a:p>
+          <a:p>
+            <a:pPr>
+              <a:defRPr sz="1600">
+                <a:solidFill>
+                  <a:srgbClr val="D97706"/>
+                </a:solidFill>
+              </a:defRPr>
+            </a:pPr>
+            <a:r>
+              <a:t>Preserving Unbroken Accountability from Scene to Courtroom</a:t>
+            </a:r>
+          </a:p>
+        </p:txBody>
+      </p:sp>
+    </p:spTree>
+  </p:cSld>
+  <p:clrMapOvr>
+    <a:masterClrMapping/>
+  </p:clrMapOvr>
+  <mc:AlternateContent xmlns:mc="http://schemas.openxmlformats.org/markup-compatibility/2006">
+    <mc:Choice xmlns:p159="http://schemas.microsoft.com/office/powerpoint/2015/09/main" Requires="p159">
+      <p:transition spd="slow" p14:dur="1500">
+        <p159:morph option="byObject"/>
+      </p:transition>
+    </mc:Choice>
+    <mc:Fallback>
+      <p:transition spd="slow">
+        <p:fade/>
+      </p:transition>
+    </mc:Fallback>
+  </mc:AlternateContent>
+</p:sld>
+</file>
+
+<file path=ppt/slides/slide8.xml><?xml version="1.0" encoding="utf-8"?>
+<p:sld xmlns:p14="http://schemas.microsoft.com/office/powerpoint/2010/main" xmlns:a="http://schemas.openxmlformats.org/drawingml/2006/main" xmlns:p="http://schemas.openxmlformats.org/presentationml/2006/main" xmlns:r="http://schemas.openxmlformats.org/officeDocument/2006/relationships">
+  <p:cSld>
+    <p:spTree>
+      <p:nvGrpSpPr>
+        <p:cNvPr id="1" name=""/>
+        <p:cNvGrpSpPr/>
+        <p:nvPr/>
+      </p:nvGrpSpPr>
+      <p:grpSpPr/>
+      <p:sp>
+        <p:nvSpPr>
+          <p:cNvPr id="2" name="Rectangle 1"/>
+          <p:cNvSpPr/>
           <p:nvPr/>
         </p:nvSpPr>
         <p:spPr>
           <a:xfrm>
-            <a:off x="731520" y="685800"/>
-            <a:ext cx="10515600" cy="731520"/>
+            <a:off x="0" y="0"/>
+            <a:ext cx="12191695" cy="6858000"/>
           </a:xfrm>
           <a:prstGeom prst="rect">
             <a:avLst/>
           </a:prstGeom>
-          <a:noFill/>
-        </p:spPr>
-        <p:txBody>
-          <a:bodyPr wrap="none">
-            <a:spAutoFit/>
-          </a:bodyPr>
-          <a:lstStyle/>
-          <a:p>
-            <a:pPr>
-              <a:defRPr sz="2600" b="1">
-                <a:solidFill>
-                  <a:srgbClr val="F5F5F5"/>
-                </a:solidFill>
-              </a:defRPr>
-            </a:pPr>
-            <a:r>
-              <a:t>Evidence Integrity vs Contamination</a:t>
-            </a:r>
-          </a:p>
-        </p:txBody>
-      </p:sp>
-      <p:sp>
-        <p:nvSpPr>
-          <p:cNvPr id="5" name="TextBox 4"/>
-          <p:cNvSpPr txBox="1"/>
-          <p:nvPr/>
-        </p:nvSpPr>
-        <p:spPr>
-          <a:xfrm>
-            <a:off x="731520" y="6400800"/>
-            <a:ext cx="10728655" cy="320040"/>
-          </a:xfrm>
-          <a:prstGeom prst="rect">
-            <a:avLst/>
-          </a:prstGeom>
-          <a:noFill/>
-        </p:spPr>
-        <p:txBody>
-          <a:bodyPr wrap="none">
-            <a:spAutoFit/>
-          </a:bodyPr>
-          <a:lstStyle/>
-          <a:p>
-            <a:pPr>
-              <a:defRPr sz="900">
-                <a:solidFill>
-                  <a:srgbClr val="9CA3AF"/>
-                </a:solidFill>
-              </a:defRPr>
-            </a:pPr>
-            <a:r>
-              <a:t>STI West Negros University  •  Jhon Paulo V. Gascon  •  Slide 7 of 11</a:t>
-            </a:r>
-          </a:p>
-        </p:txBody>
-      </p:sp>
-      <p:sp>
-        <p:nvSpPr>
-          <p:cNvPr id="6" name="Rounded Rectangle 5"/>
-          <p:cNvSpPr/>
-          <p:nvPr/>
-        </p:nvSpPr>
-        <p:spPr>
-          <a:xfrm>
-            <a:off x="731520" y="1828800"/>
-            <a:ext cx="5212080" cy="4114800"/>
-          </a:xfrm>
-          <a:prstGeom prst="roundRect">
-            <a:avLst/>
-          </a:prstGeom>
           <a:solidFill>
-            <a:srgbClr val="1B2026"/>
+            <a:srgbClr val="111418"/>
           </a:solidFill>
-          <a:ln w="25400">
-            <a:solidFill>
-              <a:srgbClr val="C8102E"/>
-            </a:solidFill>
+          <a:ln>
+            <a:noFill/>
           </a:ln>
         </p:spPr>
         <p:style>
@@ -7352,14 +6497,14 @@
       </p:sp>
       <p:sp>
         <p:nvSpPr>
-          <p:cNvPr id="7" name="TextBox 6"/>
+          <p:cNvPr id="3" name="TextBox 2"/>
           <p:cNvSpPr txBox="1"/>
           <p:nvPr/>
         </p:nvSpPr>
         <p:spPr>
           <a:xfrm>
-            <a:off x="914400" y="2011680"/>
-            <a:ext cx="4846320" cy="3657600"/>
+            <a:off x="731520" y="457200"/>
+            <a:ext cx="10698480" cy="1005840"/>
           </a:xfrm>
           <a:prstGeom prst="rect">
             <a:avLst/>
@@ -7373,98 +6518,74 @@
           <a:lstStyle/>
           <a:p>
             <a:pPr>
-              <a:defRPr sz="1800" b="1">
-                <a:solidFill>
-                  <a:srgbClr val="C8102E"/>
+              <a:defRPr sz="1100" b="1">
+                <a:solidFill>
+                  <a:srgbClr val="D97706"/>
                 </a:solidFill>
               </a:defRPr>
             </a:pPr>
             <a:r>
-              <a:t>Proper Forensic Protocols</a:t>
+              <a:t>CHAIN OF CUSTODY</a:t>
             </a:r>
           </a:p>
           <a:p>
             <a:pPr>
-              <a:spcBef>
-                <a:spcPts val="800"/>
-              </a:spcBef>
-              <a:defRPr sz="1300">
-                <a:solidFill>
-                  <a:srgbClr val="F5F5F5"/>
+              <a:defRPr sz="2400" b="1">
+                <a:solidFill>
+                  <a:srgbClr val="FFFFFF"/>
                 </a:solidFill>
               </a:defRPr>
             </a:pPr>
             <a:r>
-              <a:t>•  Strict single-entry logbook enforced</a:t>
-            </a:r>
-          </a:p>
-          <a:p>
-            <a:pPr>
-              <a:spcBef>
-                <a:spcPts val="800"/>
-              </a:spcBef>
-              <a:defRPr sz="1300">
-                <a:solidFill>
-                  <a:srgbClr val="F5F5F5"/>
-                </a:solidFill>
-              </a:defRPr>
-            </a:pPr>
-            <a:r>
-              <a:t>•  Sterile disposable tools used per item</a:t>
-            </a:r>
-          </a:p>
-          <a:p>
-            <a:pPr>
-              <a:spcBef>
-                <a:spcPts val="800"/>
-              </a:spcBef>
-              <a:defRPr sz="1300">
-                <a:solidFill>
-                  <a:srgbClr val="F5F5F5"/>
-                </a:solidFill>
-              </a:defRPr>
-            </a:pPr>
-            <a:r>
-              <a:t>•  Air-drying biological stains before paper bag packaging</a:t>
-            </a:r>
-          </a:p>
-          <a:p>
-            <a:pPr>
-              <a:spcBef>
-                <a:spcPts val="800"/>
-              </a:spcBef>
-              <a:defRPr sz="1300">
-                <a:solidFill>
-                  <a:srgbClr val="F5F5F5"/>
-                </a:solidFill>
-              </a:defRPr>
-            </a:pPr>
-            <a:r>
-              <a:t>•  Continuous signed chain of custody log</a:t>
-            </a:r>
-          </a:p>
-        </p:txBody>
-      </p:sp>
-      <p:sp>
-        <p:nvSpPr>
-          <p:cNvPr id="8" name="Rounded Rectangle 7"/>
+              <a:t>Evidence Tagging &amp; Custody Records</a:t>
+            </a:r>
+          </a:p>
+        </p:txBody>
+      </p:sp>
+      <p:pic>
+        <p:nvPicPr>
+          <p:cNvPr id="4" name="!!Content_Image" descr="csi_search.png"/>
+          <p:cNvPicPr>
+            <a:picLocks noChangeAspect="1"/>
+          </p:cNvPicPr>
+          <p:nvPr/>
+        </p:nvPicPr>
+        <p:blipFill>
+          <a:blip r:embed="rId2"/>
+          <a:stretch>
+            <a:fillRect/>
+          </a:stretch>
+        </p:blipFill>
+        <p:spPr>
+          <a:xfrm>
+            <a:off x="731520" y="1645920"/>
+            <a:ext cx="5029200" cy="4389120"/>
+          </a:xfrm>
+          <a:prstGeom prst="rect">
+            <a:avLst/>
+          </a:prstGeom>
+        </p:spPr>
+      </p:pic>
+      <p:sp>
+        <p:nvSpPr>
+          <p:cNvPr id="5" name="!!Card_1"/>
           <p:cNvSpPr/>
           <p:nvPr/>
         </p:nvSpPr>
         <p:spPr>
           <a:xfrm>
-            <a:off x="6217920" y="1828800"/>
-            <a:ext cx="5212080" cy="4114800"/>
+            <a:off x="6126480" y="1645920"/>
+            <a:ext cx="5303520" cy="1280160"/>
           </a:xfrm>
           <a:prstGeom prst="roundRect">
             <a:avLst/>
           </a:prstGeom>
           <a:solidFill>
-            <a:srgbClr val="1B2026"/>
+            <a:srgbClr val="1C2026"/>
           </a:solidFill>
-          <a:ln w="25400">
+          <a:ln w="12700">
             <a:solidFill>
-              <a:srgbClr val="8A94A6"/>
+              <a:srgbClr val="D97706"/>
             </a:solidFill>
           </a:ln>
         </p:spPr>
@@ -7483,104 +6604,162 @@
           </a:fontRef>
         </p:style>
         <p:txBody>
-          <a:bodyPr rtlCol="0" anchor="ctr"/>
-          <a:lstStyle/>
-          <a:p>
-            <a:pPr algn="ctr"/>
-          </a:p>
-        </p:txBody>
-      </p:sp>
-      <p:sp>
-        <p:nvSpPr>
-          <p:cNvPr id="9" name="TextBox 8"/>
-          <p:cNvSpPr txBox="1"/>
+          <a:bodyPr rtlCol="0" anchor="ctr" wrap="square"/>
+          <a:lstStyle/>
+          <a:p>
+            <a:pPr algn="ctr">
+              <a:defRPr b="1" sz="1300">
+                <a:solidFill>
+                  <a:srgbClr val="FFFFFF"/>
+                </a:solidFill>
+              </a:defRPr>
+            </a:pPr>
+            <a:r>
+              <a:t>Tamper-Evident Evidence Seals</a:t>
+            </a:r>
+          </a:p>
+          <a:p>
+            <a:pPr>
+              <a:defRPr sz="1050">
+                <a:solidFill>
+                  <a:srgbClr val="F0F0F0"/>
+                </a:solidFill>
+              </a:defRPr>
+            </a:pPr>
+            <a:r>
+              <a:t>Custody labels signed across tape seams; any peel attempt creates visible voids.</a:t>
+            </a:r>
+          </a:p>
+        </p:txBody>
+      </p:sp>
+      <p:sp>
+        <p:nvSpPr>
+          <p:cNvPr id="6" name="!!Card_2"/>
+          <p:cNvSpPr/>
           <p:nvPr/>
         </p:nvSpPr>
         <p:spPr>
           <a:xfrm>
-            <a:off x="6400800" y="2011680"/>
-            <a:ext cx="4846320" cy="3657600"/>
-          </a:xfrm>
-          <a:prstGeom prst="rect">
+            <a:off x="6126480" y="3108960"/>
+            <a:ext cx="5303520" cy="1280160"/>
+          </a:xfrm>
+          <a:prstGeom prst="roundRect">
             <a:avLst/>
           </a:prstGeom>
-          <a:noFill/>
-        </p:spPr>
-        <p:txBody>
-          <a:bodyPr wrap="square">
-            <a:spAutoFit/>
-          </a:bodyPr>
-          <a:lstStyle/>
+          <a:solidFill>
+            <a:srgbClr val="1C2026"/>
+          </a:solidFill>
+          <a:ln w="12700">
+            <a:solidFill>
+              <a:srgbClr val="D97706"/>
+            </a:solidFill>
+          </a:ln>
+        </p:spPr>
+        <p:style>
+          <a:lnRef idx="1">
+            <a:schemeClr val="accent1"/>
+          </a:lnRef>
+          <a:fillRef idx="3">
+            <a:schemeClr val="accent1"/>
+          </a:fillRef>
+          <a:effectRef idx="2">
+            <a:schemeClr val="accent1"/>
+          </a:effectRef>
+          <a:fontRef idx="minor">
+            <a:schemeClr val="lt1"/>
+          </a:fontRef>
+        </p:style>
+        <p:txBody>
+          <a:bodyPr rtlCol="0" anchor="ctr" wrap="square"/>
+          <a:lstStyle/>
+          <a:p>
+            <a:pPr algn="ctr">
+              <a:defRPr b="1" sz="1300">
+                <a:solidFill>
+                  <a:srgbClr val="FFFFFF"/>
+                </a:solidFill>
+              </a:defRPr>
+            </a:pPr>
+            <a:r>
+              <a:t>Comprehensive Transfer Receipts</a:t>
+            </a:r>
+          </a:p>
           <a:p>
             <a:pPr>
-              <a:defRPr sz="1800" b="1">
-                <a:solidFill>
-                  <a:srgbClr val="8A94A6"/>
+              <a:defRPr sz="1050">
+                <a:solidFill>
+                  <a:srgbClr val="F0F0F0"/>
                 </a:solidFill>
               </a:defRPr>
             </a:pPr>
             <a:r>
-              <a:t>Fatal CSI Errors</a:t>
+              <a:t>Exact log recording date, time, releasing officer, receiving technician, and specific analysis requested.</a:t>
+            </a:r>
+          </a:p>
+        </p:txBody>
+      </p:sp>
+      <p:sp>
+        <p:nvSpPr>
+          <p:cNvPr id="7" name="!!Card_3"/>
+          <p:cNvSpPr/>
+          <p:nvPr/>
+        </p:nvSpPr>
+        <p:spPr>
+          <a:xfrm>
+            <a:off x="6126480" y="4572000"/>
+            <a:ext cx="5303520" cy="1280160"/>
+          </a:xfrm>
+          <a:prstGeom prst="roundRect">
+            <a:avLst/>
+          </a:prstGeom>
+          <a:solidFill>
+            <a:srgbClr val="1C2026"/>
+          </a:solidFill>
+          <a:ln w="12700">
+            <a:solidFill>
+              <a:srgbClr val="D97706"/>
+            </a:solidFill>
+          </a:ln>
+        </p:spPr>
+        <p:style>
+          <a:lnRef idx="1">
+            <a:schemeClr val="accent1"/>
+          </a:lnRef>
+          <a:fillRef idx="3">
+            <a:schemeClr val="accent1"/>
+          </a:fillRef>
+          <a:effectRef idx="2">
+            <a:schemeClr val="accent1"/>
+          </a:effectRef>
+          <a:fontRef idx="minor">
+            <a:schemeClr val="lt1"/>
+          </a:fontRef>
+        </p:style>
+        <p:txBody>
+          <a:bodyPr rtlCol="0" anchor="ctr" wrap="square"/>
+          <a:lstStyle/>
+          <a:p>
+            <a:pPr algn="ctr">
+              <a:defRPr b="1" sz="1300">
+                <a:solidFill>
+                  <a:srgbClr val="FFFFFF"/>
+                </a:solidFill>
+              </a:defRPr>
+            </a:pPr>
+            <a:r>
+              <a:t>Secure Evidence Locker Vaults</a:t>
             </a:r>
           </a:p>
           <a:p>
             <a:pPr>
-              <a:spcBef>
-                <a:spcPts val="800"/>
-              </a:spcBef>
-              <a:defRPr sz="1300">
-                <a:solidFill>
-                  <a:srgbClr val="F5F5F5"/>
+              <a:defRPr sz="1050">
+                <a:solidFill>
+                  <a:srgbClr val="F0F0F0"/>
                 </a:solidFill>
               </a:defRPr>
             </a:pPr>
             <a:r>
-              <a:t>•  Allowing non-essential officers inside</a:t>
-            </a:r>
-          </a:p>
-          <a:p>
-            <a:pPr>
-              <a:spcBef>
-                <a:spcPts val="800"/>
-              </a:spcBef>
-              <a:defRPr sz="1300">
-                <a:solidFill>
-                  <a:srgbClr val="F5F5F5"/>
-                </a:solidFill>
-              </a:defRPr>
-            </a:pPr>
-            <a:r>
-              <a:t>•  Packaging moist blood swabs in airtight plastic</a:t>
-            </a:r>
-          </a:p>
-          <a:p>
-            <a:pPr>
-              <a:spcBef>
-                <a:spcPts val="800"/>
-              </a:spcBef>
-              <a:defRPr sz="1300">
-                <a:solidFill>
-                  <a:srgbClr val="F5F5F5"/>
-                </a:solidFill>
-              </a:defRPr>
-            </a:pPr>
-            <a:r>
-              <a:t>•  Failing to photograph evidence in situ before collection</a:t>
-            </a:r>
-          </a:p>
-          <a:p>
-            <a:pPr>
-              <a:spcBef>
-                <a:spcPts val="800"/>
-              </a:spcBef>
-              <a:defRPr sz="1300">
-                <a:solidFill>
-                  <a:srgbClr val="F5F5F5"/>
-                </a:solidFill>
-              </a:defRPr>
-            </a:pPr>
-            <a:r>
-              <a:t>•  Unrecorded handoffs between officers</a:t>
+              <a:t>Climate-controlled, biometric-logged storage preventing unauthorized access or spoliation.</a:t>
             </a:r>
           </a:p>
         </p:txBody>
@@ -7596,8 +6775,8 @@
 </p:sld>
 </file>
 
-<file path=ppt/slides/slide8.xml><?xml version="1.0" encoding="utf-8"?>
-<p:sld xmlns:a="http://schemas.openxmlformats.org/drawingml/2006/main" xmlns:p="http://schemas.openxmlformats.org/presentationml/2006/main" xmlns:r="http://schemas.openxmlformats.org/officeDocument/2006/relationships">
+<file path=ppt/slides/slide9.xml><?xml version="1.0" encoding="utf-8"?>
+<p:sld xmlns:p14="http://schemas.microsoft.com/office/powerpoint/2010/main" xmlns:a="http://schemas.openxmlformats.org/drawingml/2006/main" xmlns:p="http://schemas.openxmlformats.org/presentationml/2006/main" xmlns:r="http://schemas.openxmlformats.org/officeDocument/2006/relationships">
   <p:cSld>
     <p:spTree>
       <p:nvGrpSpPr>
@@ -7657,8 +6836,8 @@
         </p:nvSpPr>
         <p:spPr>
           <a:xfrm>
-            <a:off x="731520" y="6400800"/>
-            <a:ext cx="10728655" cy="320040"/>
+            <a:off x="731520" y="457200"/>
+            <a:ext cx="10698480" cy="1005840"/>
           </a:xfrm>
           <a:prstGeom prst="rect">
             <a:avLst/>
@@ -7666,43 +6845,57 @@
           <a:noFill/>
         </p:spPr>
         <p:txBody>
-          <a:bodyPr wrap="none">
+          <a:bodyPr wrap="square">
             <a:spAutoFit/>
           </a:bodyPr>
           <a:lstStyle/>
           <a:p>
             <a:pPr>
-              <a:defRPr sz="900">
-                <a:solidFill>
-                  <a:srgbClr val="9CA3AF"/>
+              <a:defRPr sz="1100" b="1">
+                <a:solidFill>
+                  <a:srgbClr val="D97706"/>
                 </a:solidFill>
               </a:defRPr>
             </a:pPr>
             <a:r>
-              <a:t>STI West Negros University  •  Jhon Paulo V. Gascon  •  Slide 8 of 11</a:t>
-            </a:r>
-          </a:p>
-        </p:txBody>
-      </p:sp>
-      <p:sp>
-        <p:nvSpPr>
-          <p:cNvPr id="4" name="Rectangle 3"/>
+              <a:t>JUDICIAL SCRUTINY</a:t>
+            </a:r>
+          </a:p>
+          <a:p>
+            <a:pPr>
+              <a:defRPr sz="2400" b="1">
+                <a:solidFill>
+                  <a:srgbClr val="FFFFFF"/>
+                </a:solidFill>
+              </a:defRPr>
+            </a:pPr>
+            <a:r>
+              <a:t>Three Grounds for Evidence Inadmissibility</a:t>
+            </a:r>
+          </a:p>
+        </p:txBody>
+      </p:sp>
+      <p:sp>
+        <p:nvSpPr>
+          <p:cNvPr id="4" name="!!Card_1"/>
           <p:cNvSpPr/>
           <p:nvPr/>
         </p:nvSpPr>
         <p:spPr>
           <a:xfrm>
-            <a:off x="731520" y="2286000"/>
-            <a:ext cx="457200" cy="2560320"/>
-          </a:xfrm>
-          <a:prstGeom prst="rect">
+            <a:off x="731520" y="1645920"/>
+            <a:ext cx="3291840" cy="4114800"/>
+          </a:xfrm>
+          <a:prstGeom prst="roundRect">
             <a:avLst/>
           </a:prstGeom>
           <a:solidFill>
-            <a:srgbClr val="C8102E"/>
+            <a:srgbClr val="1C2026"/>
           </a:solidFill>
-          <a:ln>
-            <a:noFill/>
+          <a:ln w="19050">
+            <a:solidFill>
+              <a:srgbClr val="D97706"/>
+            </a:solidFill>
           </a:ln>
         </p:spPr>
         <p:style>
@@ -7720,79 +6913,162 @@
           </a:fontRef>
         </p:style>
         <p:txBody>
-          <a:bodyPr rtlCol="0" anchor="ctr"/>
-          <a:lstStyle/>
-          <a:p>
-            <a:pPr algn="ctr"/>
-          </a:p>
-        </p:txBody>
-      </p:sp>
-      <p:sp>
-        <p:nvSpPr>
-          <p:cNvPr id="5" name="TextBox 4"/>
-          <p:cNvSpPr txBox="1"/>
+          <a:bodyPr rtlCol="0" anchor="ctr" wrap="square"/>
+          <a:lstStyle/>
+          <a:p>
+            <a:pPr algn="ctr">
+              <a:defRPr b="1" sz="1500">
+                <a:solidFill>
+                  <a:srgbClr val="D97706"/>
+                </a:solidFill>
+              </a:defRPr>
+            </a:pPr>
+            <a:r>
+              <a:t>1. Unlawful Search (Warrantless)</a:t>
+            </a:r>
+          </a:p>
+          <a:p>
+            <a:pPr>
+              <a:defRPr sz="1100">
+                <a:solidFill>
+                  <a:srgbClr val="F0F0F0"/>
+                </a:solidFill>
+              </a:defRPr>
+            </a:pPr>
+            <a:r>
+              <a:t>Evidence obtained in violation of Sec. 2, Art. III of the 1987 Constitution falls under the Exclusionary Rule.</a:t>
+            </a:r>
+          </a:p>
+        </p:txBody>
+      </p:sp>
+      <p:sp>
+        <p:nvSpPr>
+          <p:cNvPr id="5" name="!!Card_2"/>
+          <p:cNvSpPr/>
           <p:nvPr/>
         </p:nvSpPr>
         <p:spPr>
           <a:xfrm>
-            <a:off x="1463040" y="2194560"/>
-            <a:ext cx="9601200" cy="1371600"/>
-          </a:xfrm>
-          <a:prstGeom prst="rect">
+            <a:off x="4389120" y="1645920"/>
+            <a:ext cx="3291840" cy="4114800"/>
+          </a:xfrm>
+          <a:prstGeom prst="roundRect">
             <a:avLst/>
           </a:prstGeom>
-          <a:noFill/>
-        </p:spPr>
-        <p:txBody>
-          <a:bodyPr wrap="none">
-            <a:spAutoFit/>
-          </a:bodyPr>
-          <a:lstStyle/>
+          <a:solidFill>
+            <a:srgbClr val="1C2026"/>
+          </a:solidFill>
+          <a:ln w="19050">
+            <a:solidFill>
+              <a:srgbClr val="D97706"/>
+            </a:solidFill>
+          </a:ln>
+        </p:spPr>
+        <p:style>
+          <a:lnRef idx="1">
+            <a:schemeClr val="accent1"/>
+          </a:lnRef>
+          <a:fillRef idx="3">
+            <a:schemeClr val="accent1"/>
+          </a:fillRef>
+          <a:effectRef idx="2">
+            <a:schemeClr val="accent1"/>
+          </a:effectRef>
+          <a:fontRef idx="minor">
+            <a:schemeClr val="lt1"/>
+          </a:fontRef>
+        </p:style>
+        <p:txBody>
+          <a:bodyPr rtlCol="0" anchor="ctr" wrap="square"/>
+          <a:lstStyle/>
+          <a:p>
+            <a:pPr algn="ctr">
+              <a:defRPr b="1" sz="1500">
+                <a:solidFill>
+                  <a:srgbClr val="D97706"/>
+                </a:solidFill>
+              </a:defRPr>
+            </a:pPr>
+            <a:r>
+              <a:t>2. Contamination / Spoliation</a:t>
+            </a:r>
+          </a:p>
           <a:p>
             <a:pPr>
-              <a:defRPr sz="3800" b="1">
-                <a:solidFill>
-                  <a:srgbClr val="F5F5F5"/>
+              <a:defRPr sz="1100">
+                <a:solidFill>
+                  <a:srgbClr val="F0F0F0"/>
                 </a:solidFill>
               </a:defRPr>
             </a:pPr>
             <a:r>
-              <a:t>Part II: Evidence Recovery &amp; Legal Admissibility</a:t>
-            </a:r>
-          </a:p>
-        </p:txBody>
-      </p:sp>
-      <p:sp>
-        <p:nvSpPr>
-          <p:cNvPr id="6" name="TextBox 5"/>
-          <p:cNvSpPr txBox="1"/>
+              <a:t>Failure to wear protective PPE resulting in investigator DNA being introduced into biological samples.</a:t>
+            </a:r>
+          </a:p>
+        </p:txBody>
+      </p:sp>
+      <p:sp>
+        <p:nvSpPr>
+          <p:cNvPr id="6" name="!!Card_3"/>
+          <p:cNvSpPr/>
           <p:nvPr/>
         </p:nvSpPr>
         <p:spPr>
           <a:xfrm>
-            <a:off x="1463040" y="3657600"/>
-            <a:ext cx="9601200" cy="1371600"/>
-          </a:xfrm>
-          <a:prstGeom prst="rect">
+            <a:off x="8046720" y="1645920"/>
+            <a:ext cx="3291840" cy="4114800"/>
+          </a:xfrm>
+          <a:prstGeom prst="roundRect">
             <a:avLst/>
           </a:prstGeom>
-          <a:noFill/>
-        </p:spPr>
-        <p:txBody>
-          <a:bodyPr wrap="none">
-            <a:spAutoFit/>
-          </a:bodyPr>
-          <a:lstStyle/>
+          <a:solidFill>
+            <a:srgbClr val="1C2026"/>
+          </a:solidFill>
+          <a:ln w="19050">
+            <a:solidFill>
+              <a:srgbClr val="D97706"/>
+            </a:solidFill>
+          </a:ln>
+        </p:spPr>
+        <p:style>
+          <a:lnRef idx="1">
+            <a:schemeClr val="accent1"/>
+          </a:lnRef>
+          <a:fillRef idx="3">
+            <a:schemeClr val="accent1"/>
+          </a:fillRef>
+          <a:effectRef idx="2">
+            <a:schemeClr val="accent1"/>
+          </a:effectRef>
+          <a:fontRef idx="minor">
+            <a:schemeClr val="lt1"/>
+          </a:fontRef>
+        </p:style>
+        <p:txBody>
+          <a:bodyPr rtlCol="0" anchor="ctr" wrap="square"/>
+          <a:lstStyle/>
+          <a:p>
+            <a:pPr algn="ctr">
+              <a:defRPr b="1" sz="1500">
+                <a:solidFill>
+                  <a:srgbClr val="D97706"/>
+                </a:solidFill>
+              </a:defRPr>
+            </a:pPr>
+            <a:r>
+              <a:t>3. Broken Chain of Custody</a:t>
+            </a:r>
+          </a:p>
           <a:p>
             <a:pPr>
-              <a:defRPr sz="2200">
-                <a:solidFill>
-                  <a:srgbClr val="9CA3AF"/>
+              <a:defRPr sz="1100">
+                <a:solidFill>
+                  <a:srgbClr val="F0F0F0"/>
                 </a:solidFill>
               </a:defRPr>
             </a:pPr>
             <a:r>
-              <a:t>Systematic search methods, packaging, and constitutional compliance.</a:t>
+              <a:t>Inability to account for custody during transfer intervals creates reasonable doubt regarding tampering.</a:t>
             </a:r>
           </a:p>
         </p:txBody>
@@ -7802,618 +7078,18 @@
   <p:clrMapOvr>
     <a:masterClrMapping/>
   </p:clrMapOvr>
-  <p:transition spd="med">
-    <p:push dir="u"/>
-  </p:transition>
-</p:sld>
-</file>
-
-<file path=ppt/slides/slide9.xml><?xml version="1.0" encoding="utf-8"?>
-<p:sld xmlns:a="http://schemas.openxmlformats.org/drawingml/2006/main" xmlns:p="http://schemas.openxmlformats.org/presentationml/2006/main" xmlns:r="http://schemas.openxmlformats.org/officeDocument/2006/relationships">
-  <p:cSld>
-    <p:spTree>
-      <p:nvGrpSpPr>
-        <p:cNvPr id="1" name=""/>
-        <p:cNvGrpSpPr/>
-        <p:nvPr/>
-      </p:nvGrpSpPr>
-      <p:grpSpPr/>
-      <p:sp>
-        <p:nvSpPr>
-          <p:cNvPr id="2" name="Rectangle 1"/>
-          <p:cNvSpPr/>
-          <p:nvPr/>
-        </p:nvSpPr>
-        <p:spPr>
-          <a:xfrm>
-            <a:off x="0" y="0"/>
-            <a:ext cx="12191695" cy="6858000"/>
-          </a:xfrm>
-          <a:prstGeom prst="rect">
-            <a:avLst/>
-          </a:prstGeom>
-          <a:solidFill>
-            <a:srgbClr val="111418"/>
-          </a:solidFill>
-          <a:ln>
-            <a:noFill/>
-          </a:ln>
-        </p:spPr>
-        <p:style>
-          <a:lnRef idx="1">
-            <a:schemeClr val="accent1"/>
-          </a:lnRef>
-          <a:fillRef idx="3">
-            <a:schemeClr val="accent1"/>
-          </a:fillRef>
-          <a:effectRef idx="2">
-            <a:schemeClr val="accent1"/>
-          </a:effectRef>
-          <a:fontRef idx="minor">
-            <a:schemeClr val="lt1"/>
-          </a:fontRef>
-        </p:style>
-        <p:txBody>
-          <a:bodyPr rtlCol="0" anchor="ctr"/>
-          <a:lstStyle/>
-          <a:p>
-            <a:pPr algn="ctr"/>
-          </a:p>
-        </p:txBody>
-      </p:sp>
-      <p:sp>
-        <p:nvSpPr>
-          <p:cNvPr id="3" name="TextBox 2"/>
-          <p:cNvSpPr txBox="1"/>
-          <p:nvPr/>
-        </p:nvSpPr>
-        <p:spPr>
-          <a:xfrm>
-            <a:off x="731520" y="365760"/>
-            <a:ext cx="10058400" cy="365760"/>
-          </a:xfrm>
-          <a:prstGeom prst="rect">
-            <a:avLst/>
-          </a:prstGeom>
-          <a:noFill/>
-        </p:spPr>
-        <p:txBody>
-          <a:bodyPr wrap="none">
-            <a:spAutoFit/>
-          </a:bodyPr>
-          <a:lstStyle/>
-          <a:p>
-            <a:pPr>
-              <a:defRPr sz="1100" b="1">
-                <a:solidFill>
-                  <a:srgbClr val="C8102E"/>
-                </a:solidFill>
-              </a:defRPr>
-            </a:pPr>
-            <a:r>
-              <a:t>EXECUTION METHODOLOGY</a:t>
-            </a:r>
-          </a:p>
-        </p:txBody>
-      </p:sp>
-      <p:sp>
-        <p:nvSpPr>
-          <p:cNvPr id="4" name="TextBox 3"/>
-          <p:cNvSpPr txBox="1"/>
-          <p:nvPr/>
-        </p:nvSpPr>
-        <p:spPr>
-          <a:xfrm>
-            <a:off x="731520" y="685800"/>
-            <a:ext cx="10515600" cy="731520"/>
-          </a:xfrm>
-          <a:prstGeom prst="rect">
-            <a:avLst/>
-          </a:prstGeom>
-          <a:noFill/>
-        </p:spPr>
-        <p:txBody>
-          <a:bodyPr wrap="none">
-            <a:spAutoFit/>
-          </a:bodyPr>
-          <a:lstStyle/>
-          <a:p>
-            <a:pPr>
-              <a:defRPr sz="2600" b="1">
-                <a:solidFill>
-                  <a:srgbClr val="F5F5F5"/>
-                </a:solidFill>
-              </a:defRPr>
-            </a:pPr>
-            <a:r>
-              <a:t>The 4 Standard Systematic Search Patterns</a:t>
-            </a:r>
-          </a:p>
-        </p:txBody>
-      </p:sp>
-      <p:sp>
-        <p:nvSpPr>
-          <p:cNvPr id="5" name="TextBox 4"/>
-          <p:cNvSpPr txBox="1"/>
-          <p:nvPr/>
-        </p:nvSpPr>
-        <p:spPr>
-          <a:xfrm>
-            <a:off x="731520" y="6400800"/>
-            <a:ext cx="10728655" cy="320040"/>
-          </a:xfrm>
-          <a:prstGeom prst="rect">
-            <a:avLst/>
-          </a:prstGeom>
-          <a:noFill/>
-        </p:spPr>
-        <p:txBody>
-          <a:bodyPr wrap="none">
-            <a:spAutoFit/>
-          </a:bodyPr>
-          <a:lstStyle/>
-          <a:p>
-            <a:pPr>
-              <a:defRPr sz="900">
-                <a:solidFill>
-                  <a:srgbClr val="9CA3AF"/>
-                </a:solidFill>
-              </a:defRPr>
-            </a:pPr>
-            <a:r>
-              <a:t>STI West Negros University  •  Jhon Paulo V. Gascon  •  Slide 9 of 11</a:t>
-            </a:r>
-          </a:p>
-        </p:txBody>
-      </p:sp>
-      <p:sp>
-        <p:nvSpPr>
-          <p:cNvPr id="6" name="Rounded Rectangle 5"/>
-          <p:cNvSpPr/>
-          <p:nvPr/>
-        </p:nvSpPr>
-        <p:spPr>
-          <a:xfrm>
-            <a:off x="731520" y="2011680"/>
-            <a:ext cx="2514600" cy="3840480"/>
-          </a:xfrm>
-          <a:prstGeom prst="roundRect">
-            <a:avLst/>
-          </a:prstGeom>
-          <a:solidFill>
-            <a:srgbClr val="1B2026"/>
-          </a:solidFill>
-          <a:ln w="19050">
-            <a:solidFill>
-              <a:srgbClr val="C8102E"/>
-            </a:solidFill>
-          </a:ln>
-        </p:spPr>
-        <p:style>
-          <a:lnRef idx="1">
-            <a:schemeClr val="accent1"/>
-          </a:lnRef>
-          <a:fillRef idx="3">
-            <a:schemeClr val="accent1"/>
-          </a:fillRef>
-          <a:effectRef idx="2">
-            <a:schemeClr val="accent1"/>
-          </a:effectRef>
-          <a:fontRef idx="minor">
-            <a:schemeClr val="lt1"/>
-          </a:fontRef>
-        </p:style>
-        <p:txBody>
-          <a:bodyPr rtlCol="0" anchor="ctr"/>
-          <a:lstStyle/>
-          <a:p>
-            <a:pPr algn="ctr"/>
-          </a:p>
-        </p:txBody>
-      </p:sp>
-      <p:sp>
-        <p:nvSpPr>
-          <p:cNvPr id="7" name="TextBox 6"/>
-          <p:cNvSpPr txBox="1"/>
-          <p:nvPr/>
-        </p:nvSpPr>
-        <p:spPr>
-          <a:xfrm>
-            <a:off x="868680" y="2194560"/>
-            <a:ext cx="2240280" cy="3474720"/>
-          </a:xfrm>
-          <a:prstGeom prst="rect">
-            <a:avLst/>
-          </a:prstGeom>
-          <a:noFill/>
-        </p:spPr>
-        <p:txBody>
-          <a:bodyPr wrap="square">
-            <a:spAutoFit/>
-          </a:bodyPr>
-          <a:lstStyle/>
-          <a:p>
-            <a:pPr>
-              <a:defRPr sz="1300" b="1">
-                <a:solidFill>
-                  <a:srgbClr val="8A94A6"/>
-                </a:solidFill>
-              </a:defRPr>
-            </a:pPr>
-            <a:r>
-              <a:t>Pattern 1</a:t>
-            </a:r>
-          </a:p>
-          <a:p>
-            <a:pPr>
-              <a:spcBef>
-                <a:spcPts val="600"/>
-              </a:spcBef>
-              <a:defRPr sz="1600" b="1">
-                <a:solidFill>
-                  <a:srgbClr val="F5F5F5"/>
-                </a:solidFill>
-              </a:defRPr>
-            </a:pPr>
-            <a:r>
-              <a:t>Strip / Lane Search</a:t>
-            </a:r>
-          </a:p>
-          <a:p>
-            <a:pPr>
-              <a:spcBef>
-                <a:spcPts val="800"/>
-              </a:spcBef>
-              <a:defRPr sz="1200">
-                <a:solidFill>
-                  <a:srgbClr val="9CA3AF"/>
-                </a:solidFill>
-              </a:defRPr>
-            </a:pPr>
-            <a:r>
-              <a:t>Investigators walk parallel lanes across large outdoor open terrain.</a:t>
-            </a:r>
-          </a:p>
-        </p:txBody>
-      </p:sp>
-      <p:sp>
-        <p:nvSpPr>
-          <p:cNvPr id="8" name="Rounded Rectangle 7"/>
-          <p:cNvSpPr/>
-          <p:nvPr/>
-        </p:nvSpPr>
-        <p:spPr>
-          <a:xfrm>
-            <a:off x="3429000" y="2011680"/>
-            <a:ext cx="2514600" cy="3840480"/>
-          </a:xfrm>
-          <a:prstGeom prst="roundRect">
-            <a:avLst/>
-          </a:prstGeom>
-          <a:solidFill>
-            <a:srgbClr val="1B2026"/>
-          </a:solidFill>
-          <a:ln w="19050">
-            <a:solidFill>
-              <a:srgbClr val="C8102E"/>
-            </a:solidFill>
-          </a:ln>
-        </p:spPr>
-        <p:style>
-          <a:lnRef idx="1">
-            <a:schemeClr val="accent1"/>
-          </a:lnRef>
-          <a:fillRef idx="3">
-            <a:schemeClr val="accent1"/>
-          </a:fillRef>
-          <a:effectRef idx="2">
-            <a:schemeClr val="accent1"/>
-          </a:effectRef>
-          <a:fontRef idx="minor">
-            <a:schemeClr val="lt1"/>
-          </a:fontRef>
-        </p:style>
-        <p:txBody>
-          <a:bodyPr rtlCol="0" anchor="ctr"/>
-          <a:lstStyle/>
-          <a:p>
-            <a:pPr algn="ctr"/>
-          </a:p>
-        </p:txBody>
-      </p:sp>
-      <p:sp>
-        <p:nvSpPr>
-          <p:cNvPr id="9" name="TextBox 8"/>
-          <p:cNvSpPr txBox="1"/>
-          <p:nvPr/>
-        </p:nvSpPr>
-        <p:spPr>
-          <a:xfrm>
-            <a:off x="3566160" y="2194560"/>
-            <a:ext cx="2240280" cy="3474720"/>
-          </a:xfrm>
-          <a:prstGeom prst="rect">
-            <a:avLst/>
-          </a:prstGeom>
-          <a:noFill/>
-        </p:spPr>
-        <p:txBody>
-          <a:bodyPr wrap="square">
-            <a:spAutoFit/>
-          </a:bodyPr>
-          <a:lstStyle/>
-          <a:p>
-            <a:pPr>
-              <a:defRPr sz="1300" b="1">
-                <a:solidFill>
-                  <a:srgbClr val="8A94A6"/>
-                </a:solidFill>
-              </a:defRPr>
-            </a:pPr>
-            <a:r>
-              <a:t>Pattern 2</a:t>
-            </a:r>
-          </a:p>
-          <a:p>
-            <a:pPr>
-              <a:spcBef>
-                <a:spcPts val="600"/>
-              </a:spcBef>
-              <a:defRPr sz="1600" b="1">
-                <a:solidFill>
-                  <a:srgbClr val="F5F5F5"/>
-                </a:solidFill>
-              </a:defRPr>
-            </a:pPr>
-            <a:r>
-              <a:t>Grid Double-Check</a:t>
-            </a:r>
-          </a:p>
-          <a:p>
-            <a:pPr>
-              <a:spcBef>
-                <a:spcPts val="800"/>
-              </a:spcBef>
-              <a:defRPr sz="1200">
-                <a:solidFill>
-                  <a:srgbClr val="9CA3AF"/>
-                </a:solidFill>
-              </a:defRPr>
-            </a:pPr>
-            <a:r>
-              <a:t>Perpendicular double-pass providing highest search thoroughness.</a:t>
-            </a:r>
-          </a:p>
-        </p:txBody>
-      </p:sp>
-      <p:sp>
-        <p:nvSpPr>
-          <p:cNvPr id="10" name="Rounded Rectangle 9"/>
-          <p:cNvSpPr/>
-          <p:nvPr/>
-        </p:nvSpPr>
-        <p:spPr>
-          <a:xfrm>
-            <a:off x="6126480" y="2011680"/>
-            <a:ext cx="2514600" cy="3840480"/>
-          </a:xfrm>
-          <a:prstGeom prst="roundRect">
-            <a:avLst/>
-          </a:prstGeom>
-          <a:solidFill>
-            <a:srgbClr val="1B2026"/>
-          </a:solidFill>
-          <a:ln w="19050">
-            <a:solidFill>
-              <a:srgbClr val="C8102E"/>
-            </a:solidFill>
-          </a:ln>
-        </p:spPr>
-        <p:style>
-          <a:lnRef idx="1">
-            <a:schemeClr val="accent1"/>
-          </a:lnRef>
-          <a:fillRef idx="3">
-            <a:schemeClr val="accent1"/>
-          </a:fillRef>
-          <a:effectRef idx="2">
-            <a:schemeClr val="accent1"/>
-          </a:effectRef>
-          <a:fontRef idx="minor">
-            <a:schemeClr val="lt1"/>
-          </a:fontRef>
-        </p:style>
-        <p:txBody>
-          <a:bodyPr rtlCol="0" anchor="ctr"/>
-          <a:lstStyle/>
-          <a:p>
-            <a:pPr algn="ctr"/>
-          </a:p>
-        </p:txBody>
-      </p:sp>
-      <p:sp>
-        <p:nvSpPr>
-          <p:cNvPr id="11" name="TextBox 10"/>
-          <p:cNvSpPr txBox="1"/>
-          <p:nvPr/>
-        </p:nvSpPr>
-        <p:spPr>
-          <a:xfrm>
-            <a:off x="6263640" y="2194560"/>
-            <a:ext cx="2240280" cy="3474720"/>
-          </a:xfrm>
-          <a:prstGeom prst="rect">
-            <a:avLst/>
-          </a:prstGeom>
-          <a:noFill/>
-        </p:spPr>
-        <p:txBody>
-          <a:bodyPr wrap="square">
-            <a:spAutoFit/>
-          </a:bodyPr>
-          <a:lstStyle/>
-          <a:p>
-            <a:pPr>
-              <a:defRPr sz="1300" b="1">
-                <a:solidFill>
-                  <a:srgbClr val="8A94A6"/>
-                </a:solidFill>
-              </a:defRPr>
-            </a:pPr>
-            <a:r>
-              <a:t>Pattern 3</a:t>
-            </a:r>
-          </a:p>
-          <a:p>
-            <a:pPr>
-              <a:spcBef>
-                <a:spcPts val="600"/>
-              </a:spcBef>
-              <a:defRPr sz="1600" b="1">
-                <a:solidFill>
-                  <a:srgbClr val="F5F5F5"/>
-                </a:solidFill>
-              </a:defRPr>
-            </a:pPr>
-            <a:r>
-              <a:t>Spiral Method</a:t>
-            </a:r>
-          </a:p>
-          <a:p>
-            <a:pPr>
-              <a:spcBef>
-                <a:spcPts val="800"/>
-              </a:spcBef>
-              <a:defRPr sz="1200">
-                <a:solidFill>
-                  <a:srgbClr val="9CA3AF"/>
-                </a:solidFill>
-              </a:defRPr>
-            </a:pPr>
-            <a:r>
-              <a:t>Inward or outward circular pattern ideal for single-room crime scenes.</a:t>
-            </a:r>
-          </a:p>
-        </p:txBody>
-      </p:sp>
-      <p:sp>
-        <p:nvSpPr>
-          <p:cNvPr id="12" name="Rounded Rectangle 11"/>
-          <p:cNvSpPr/>
-          <p:nvPr/>
-        </p:nvSpPr>
-        <p:spPr>
-          <a:xfrm>
-            <a:off x="8823960" y="2011680"/>
-            <a:ext cx="2514600" cy="3840480"/>
-          </a:xfrm>
-          <a:prstGeom prst="roundRect">
-            <a:avLst/>
-          </a:prstGeom>
-          <a:solidFill>
-            <a:srgbClr val="1B2026"/>
-          </a:solidFill>
-          <a:ln w="19050">
-            <a:solidFill>
-              <a:srgbClr val="C8102E"/>
-            </a:solidFill>
-          </a:ln>
-        </p:spPr>
-        <p:style>
-          <a:lnRef idx="1">
-            <a:schemeClr val="accent1"/>
-          </a:lnRef>
-          <a:fillRef idx="3">
-            <a:schemeClr val="accent1"/>
-          </a:fillRef>
-          <a:effectRef idx="2">
-            <a:schemeClr val="accent1"/>
-          </a:effectRef>
-          <a:fontRef idx="minor">
-            <a:schemeClr val="lt1"/>
-          </a:fontRef>
-        </p:style>
-        <p:txBody>
-          <a:bodyPr rtlCol="0" anchor="ctr"/>
-          <a:lstStyle/>
-          <a:p>
-            <a:pPr algn="ctr"/>
-          </a:p>
-        </p:txBody>
-      </p:sp>
-      <p:sp>
-        <p:nvSpPr>
-          <p:cNvPr id="13" name="TextBox 12"/>
-          <p:cNvSpPr txBox="1"/>
-          <p:nvPr/>
-        </p:nvSpPr>
-        <p:spPr>
-          <a:xfrm>
-            <a:off x="8961120" y="2194560"/>
-            <a:ext cx="2240280" cy="3474720"/>
-          </a:xfrm>
-          <a:prstGeom prst="rect">
-            <a:avLst/>
-          </a:prstGeom>
-          <a:noFill/>
-        </p:spPr>
-        <p:txBody>
-          <a:bodyPr wrap="square">
-            <a:spAutoFit/>
-          </a:bodyPr>
-          <a:lstStyle/>
-          <a:p>
-            <a:pPr>
-              <a:defRPr sz="1300" b="1">
-                <a:solidFill>
-                  <a:srgbClr val="8A94A6"/>
-                </a:solidFill>
-              </a:defRPr>
-            </a:pPr>
-            <a:r>
-              <a:t>Pattern 4</a:t>
-            </a:r>
-          </a:p>
-          <a:p>
-            <a:pPr>
-              <a:spcBef>
-                <a:spcPts val="600"/>
-              </a:spcBef>
-              <a:defRPr sz="1600" b="1">
-                <a:solidFill>
-                  <a:srgbClr val="F5F5F5"/>
-                </a:solidFill>
-              </a:defRPr>
-            </a:pPr>
-            <a:r>
-              <a:t>Zone / Quadrant</a:t>
-            </a:r>
-          </a:p>
-          <a:p>
-            <a:pPr>
-              <a:spcBef>
-                <a:spcPts val="800"/>
-              </a:spcBef>
-              <a:defRPr sz="1200">
-                <a:solidFill>
-                  <a:srgbClr val="9CA3AF"/>
-                </a:solidFill>
-              </a:defRPr>
-            </a:pPr>
-            <a:r>
-              <a:t>Dividing complex indoor multi-story structures into numbered sectors.</a:t>
-            </a:r>
-          </a:p>
-        </p:txBody>
-      </p:sp>
-    </p:spTree>
-  </p:cSld>
-  <p:clrMapOvr>
-    <a:masterClrMapping/>
-  </p:clrMapOvr>
-  <p:transition spd="med">
-    <p:fade/>
-  </p:transition>
+  <mc:AlternateContent xmlns:mc="http://schemas.openxmlformats.org/markup-compatibility/2006">
+    <mc:Choice xmlns:p159="http://schemas.microsoft.com/office/powerpoint/2015/09/main" Requires="p159">
+      <p:transition spd="slow" p14:dur="1500">
+        <p159:morph option="byObject"/>
+      </p:transition>
+    </mc:Choice>
+    <mc:Fallback>
+      <p:transition spd="slow">
+        <p:fade/>
+      </p:transition>
+    </mc:Fallback>
+  </mc:AlternateContent>
 </p:sld>
 </file>
 
